--- a/slides/week02/ch02_road_network.pptx
+++ b/slides/week02/ch02_road_network.pptx
@@ -26,6 +26,7 @@
     <p:sldId id="274" r:id="rId25"/>
     <p:sldId id="275" r:id="rId26"/>
     <p:sldId id="276" r:id="rId27"/>
+    <p:sldId id="277" r:id="rId28"/>
   </p:sldIdLst>
   <p:notesMasterIdLst>
     <p:notesMasterId r:id="rId15"/>
@@ -591,7 +592,7 @@
           <a:lstStyle/>
           <a:p>
             <a:r>
-              <a:t>만든 결과는 load_road_graph("hanam", modes=("drive",))와 노드·엣지 수를 대조한다. modes가 방금 만든 DRIVE 필터에 해당하고, 3장부터는 이걸 쓴다.</a:t>
+              <a:t>DRIVE 집합의 원소를 교재에서 하나씩 읽어 준다. 왜 service와 road가 들어가는지 물어보면 좋다.</a:t>
             </a:r>
           </a:p>
         </p:txBody>
@@ -661,7 +662,7 @@
           <a:lstStyle/>
           <a:p>
             <a:r>
-              <a:t>노드 좌표가 고정이라는 점을 이용한다. RoadGraph.nearest_node가 이 방식이다. KD-트리는 위경도 차이로 거리를 재므로 왜곡이 있고, 정확한 거리가 필요하면 하버사인으로 다시 계산한다.</a:t>
+              <a:t>만든 결과는 load_road_graph("hanam", modes=("drive",))와 노드·엣지 수를 대조한다. modes가 방금 만든 DRIVE 필터에 해당하고, 3장부터는 이걸 쓴다.</a:t>
             </a:r>
           </a:p>
         </p:txBody>
@@ -731,7 +732,7 @@
           <a:lstStyle/>
           <a:p>
             <a:r>
-              <a:t>숫자를 내는 것으로 끝내지 않는다. 평균 차수 2가 무엇을 뜻하는지 학생이 먼저 말하게 한다.</a:t>
+              <a:t>노드 좌표가 고정이라는 점을 이용한다. RoadGraph.nearest_node가 이 방식이다. KD-트리는 위경도 차이로 거리를 재므로 왜곡이 있고, 정확한 거리가 필요하면 하버사인으로 다시 계산한다.</a:t>
             </a:r>
           </a:p>
         </p:txBody>
@@ -801,6 +802,76 @@
           <a:lstStyle/>
           <a:p>
             <a:r>
+              <a:t>숫자를 내는 것으로 끝내지 않는다. 평균 차수 2가 무엇을 뜻하는지 학생이 먼저 말하게 한다.</a:t>
+            </a:r>
+          </a:p>
+        </p:txBody>
+      </p:sp>
+      <p:sp>
+        <p:nvSpPr>
+          <p:cNvPr id="4" name="Slide Number Placeholder 3"/>
+          <p:cNvSpPr>
+            <a:spLocks noGrp="1"/>
+          </p:cNvSpPr>
+          <p:nvPr>
+            <p:ph type="sldNum" idx="5" sz="quarter"/>
+          </p:nvPr>
+        </p:nvSpPr>
+        <p:spPr/>
+      </p:sp>
+    </p:spTree>
+  </p:cSld>
+  <p:clrMapOvr>
+    <a:masterClrMapping/>
+  </p:clrMapOvr>
+</p:notes>
+</file>
+
+<file path=ppt/notesSlides/notesSlide14.xml><?xml version="1.0" encoding="utf-8"?>
+<p:notes xmlns:a="http://schemas.openxmlformats.org/drawingml/2006/main" xmlns:p="http://schemas.openxmlformats.org/presentationml/2006/main" xmlns:r="http://schemas.openxmlformats.org/officeDocument/2006/relationships">
+  <p:cSld>
+    <p:spTree>
+      <p:nvGrpSpPr>
+        <p:cNvPr id="1" name=""/>
+        <p:cNvGrpSpPr/>
+        <p:nvPr/>
+      </p:nvGrpSpPr>
+      <p:grpSpPr>
+        <a:xfrm>
+          <a:off x="0" y="0"/>
+          <a:ext cx="0" cy="0"/>
+          <a:chOff x="0" y="0"/>
+          <a:chExt cx="0" cy="0"/>
+        </a:xfrm>
+      </p:grpSpPr>
+      <p:sp>
+        <p:nvSpPr>
+          <p:cNvPr id="2" name="Slide Image Placeholder 1"/>
+          <p:cNvSpPr>
+            <a:spLocks noGrp="1"/>
+          </p:cNvSpPr>
+          <p:nvPr>
+            <p:ph type="sldImg" idx="2"/>
+          </p:nvPr>
+        </p:nvSpPr>
+        <p:spPr/>
+      </p:sp>
+      <p:sp>
+        <p:nvSpPr>
+          <p:cNvPr id="3" name="Notes Placeholder 2"/>
+          <p:cNvSpPr>
+            <a:spLocks noGrp="1"/>
+          </p:cNvSpPr>
+          <p:nvPr>
+            <p:ph type="body" idx="3" sz="quarter"/>
+          </p:nvPr>
+        </p:nvSpPr>
+        <p:spPr/>
+        <p:txBody>
+          <a:bodyPr/>
+          <a:lstStyle/>
+          <a:p>
+            <a:r>
               <a:t>HW1 명세는 assignments/hw1.md에 있고 오늘 배포한다. 다음 주 3장에서 이 인접 리스트 위에 다익스트라를 약 90줄로 짠다. 시간이 남으면 연습 2.3(WKB 형상)을 시연하고, 직선 엣지와 실제 형상의 차이가 3장 거리 오차로 이어진다는 점을 예고한다.</a:t>
             </a:r>
           </a:p>
@@ -1011,7 +1082,7 @@
           <a:lstStyle/>
           <a:p>
             <a:r>
-              <a:t>교차로와 교차로 사이를 엣지 하나로 표현했기 때문에 노드 수가 적어 보인다. 속도는 막히지 않았을 때의 값이고, 4장에서 시간대별 실측 속도로 바꾼다.</a:t>
+              <a:t>슬라이드는 개요만 다룬다. 세부 내용과 코드는 교재 원고와 실습 노트북에서 확인한다. 교재 저장소는 비공개이므로 초대받은 계정으로 로그인한 상태여야 주소가 열린다.</a:t>
             </a:r>
           </a:p>
         </p:txBody>
@@ -1081,7 +1152,7 @@
           <a:lstStyle/>
           <a:p>
             <a:r>
-              <a:t>여기서 학생들이 처음 막힌다. 컬럼 목록을 먼저 출력해서 없다는 것을 확인시킨 뒤에 edge_id를 보여준다.</a:t>
+              <a:t>교차로와 교차로 사이를 엣지 하나로 표현했기 때문에 노드 수가 적어 보인다. 속도는 막히지 않았을 때의 값이고, 4장에서 시간대별 실측 속도로 바꾼다.</a:t>
             </a:r>
           </a:p>
         </p:txBody>
@@ -1151,7 +1222,7 @@
           <a:lstStyle/>
           <a:p>
             <a:r>
-              <a:t>규칙을 짐작했으면 그 자리에서 검증하는 것이 나중에 원인을 찾는 것보다 비용이 훨씬 적다. 이 습관이 이 과목에서 가장 오래 남는다.</a:t>
+              <a:t>여기서 학생들이 처음 막힌다. 컬럼 목록을 먼저 출력해서 없다는 것을 확인시킨 뒤에 edge_id를 보여준다.</a:t>
             </a:r>
           </a:p>
         </p:txBody>
@@ -1221,7 +1292,7 @@
           <a:lstStyle/>
           <a:p>
             <a:r>
-              <a:t>direction과 oneway의 분포를 교재에서 함께 출력해 확인한다.</a:t>
+              <a:t>규칙을 짐작했으면 그 자리에서 검증하는 것이 나중에 원인을 찾는 것보다 비용이 훨씬 적다. 이 습관이 이 과목에서 가장 오래 남는다.</a:t>
             </a:r>
           </a:p>
         </p:txBody>
@@ -1291,7 +1362,7 @@
           <a:lstStyle/>
           <a:p>
             <a:r>
-              <a:t>highway 최다 항목은 보도(footway)다. 보행·자전거 전용이 전체 엣지의 절반을 넘는다. 거르지 않고 자동차 최단경로를 구하면 계단으로 내려가고 산책로를 가로지르는 경로가 나온다. 거리는 짧지만 차는 못 간다. 그림에서 주택가 안쪽의 촘촘한 선이 사라진다는 점을 설명하고, highway 종류별 개수는 교재에서 함께 계산한다.</a:t>
+              <a:t>direction과 oneway의 분포를 교재에서 함께 출력해 확인한다.</a:t>
             </a:r>
           </a:p>
         </p:txBody>
@@ -1361,7 +1432,7 @@
           <a:lstStyle/>
           <a:p>
             <a:r>
-              <a:t>DRIVE 집합의 원소를 교재에서 하나씩 읽어 준다. 왜 service와 road가 들어가는지 물어보면 좋다.</a:t>
+              <a:t>highway 최다 항목은 보도(footway)다. 보행·자전거 전용이 전체 엣지의 절반을 넘는다. 거르지 않고 자동차 최단경로를 구하면 계단으로 내려가고 산책로를 가로지르는 경로가 나온다. 거리는 짧지만 차는 못 간다. 그림에서 주택가 안쪽의 촘촘한 선이 사라진다는 점을 설명하고, highway 종류별 개수는 교재에서 함께 계산한다.</a:t>
             </a:r>
           </a:p>
         </p:txBody>
@@ -5010,7 +5081,7 @@
           <a:lstStyle/>
           <a:p>
             <a:r>
-              <a:t>3.2 짐작한 규칙은 그 자리에서 검증</a:t>
+              <a:t>3.1 edge_id 안에 있는 양 끝 노드</a:t>
             </a:r>
           </a:p>
         </p:txBody>
@@ -5053,35 +5124,436 @@
           <a:p>
             <a:pPr/>
             <a:r>
-              <a:t>검증 대상: 파싱 결과가 실제 양 끝인지</a:t>
-            </a:r>
-          </a:p>
-          <a:p>
-            <a:pPr lvl="1"/>
-            <a:r>
-              <a:t>대조 자료: osm_node_seq_json의 첫 원소와 마지막 원소</a:t>
-            </a:r>
-          </a:p>
-          <a:p>
-            <a:pPr lvl="1"/>
-            <a:r>
-              <a:t>결과: 2,000건 중 불일치 0건</a:t>
+              <a:t>엣지 표에 source·target 컬럼 없음</a:t>
             </a:r>
           </a:p>
           <a:p>
             <a:pPr/>
             <a:r>
-              <a:t>검증 생략 시 — 몇 주 뒤 원인 불명의 경로</a:t>
+              <a:t>node_id = OSM 번호 앞에 n</a:t>
             </a:r>
           </a:p>
           <a:p>
             <a:pPr/>
             <a:r>
-              <a:t>이 과목의 데이터 태도: 짐작 직후 검증</a:t>
-            </a:r>
-          </a:p>
-        </p:txBody>
-      </p:sp>
+              <a:t>rsplit("_", 2)로 뒤 두 부분 분리</a:t>
+            </a:r>
+          </a:p>
+        </p:txBody>
+      </p:sp>
+      <p:sp>
+        <p:nvSpPr>
+          <p:cNvPr id="5" name="Text Placeholder 4"/>
+          <p:cNvSpPr>
+            <a:spLocks noGrp="1"/>
+          </p:cNvSpPr>
+          <p:nvPr>
+            <p:ph type="body" idx="103"/>
+          </p:nvPr>
+        </p:nvSpPr>
+        <p:spPr/>
+        <p:txBody>
+          <a:bodyPr/>
+          <a:lstStyle/>
+          <a:p>
+            <a:r>
+              <a:t>표 3. e37375263_f_445273230_436257996을 나눈 네 부분</a:t>
+            </a:r>
+          </a:p>
+        </p:txBody>
+      </p:sp>
+      <p:graphicFrame>
+        <p:nvGraphicFramePr>
+          <p:cNvPr id="6" name="Table Placeholder 5"/>
+          <p:cNvGraphicFramePr>
+            <a:graphicFrameLocks noGrp="1"/>
+          </p:cNvGraphicFramePr>
+          <p:nvPr>
+            <p:ph type="tbl" idx="104"/>
+          </p:nvPr>
+        </p:nvGraphicFramePr>
+        <p:xfrm>
+          <a:off x="4937760" y="1828800"/>
+          <a:ext cx="6565392" cy="2946400"/>
+        </p:xfrm>
+        <a:graphic>
+          <a:graphicData uri="http://schemas.openxmlformats.org/drawingml/2006/table">
+            <a:tbl>
+              <a:tblPr firstRow="0" bandRow="0" firstCol="0" lastRow="0" lastCol="0" bandCol="0"/>
+              <a:tblGrid>
+                <a:gridCol w="3282696"/>
+                <a:gridCol w="3282696"/>
+              </a:tblGrid>
+              <a:tr h="406400">
+                <a:tc>
+                  <a:txBody>
+                    <a:bodyPr/>
+                    <a:lstStyle/>
+                    <a:p>
+                      <a:r>
+                        <a:rPr sz="1300" b="0">
+                          <a:solidFill>
+                            <a:srgbClr val="FFFFFF"/>
+                          </a:solidFill>
+                          <a:latin typeface="Pretendard Medium"/>
+                        </a:rPr>
+                        <a:t>부분</a:t>
+                      </a:r>
+                    </a:p>
+                  </a:txBody>
+                  <a:tcPr marL="101600" marR="101600" marT="76200" marB="76200" anchor="ctr">
+                    <a:solidFill>
+                      <a:srgbClr val="000000"/>
+                    </a:solidFill>
+                    <a:lnL w="0">
+                      <a:noFill/>
+                    </a:lnL>
+                    <a:lnR w="0">
+                      <a:noFill/>
+                    </a:lnR>
+                    <a:lnT w="0">
+                      <a:noFill/>
+                    </a:lnT>
+                    <a:lnB w="0">
+                      <a:noFill/>
+                    </a:lnB>
+                  </a:tcPr>
+                </a:tc>
+                <a:tc>
+                  <a:txBody>
+                    <a:bodyPr/>
+                    <a:lstStyle/>
+                    <a:p>
+                      <a:r>
+                        <a:rPr sz="1300" b="0">
+                          <a:solidFill>
+                            <a:srgbClr val="FFFFFF"/>
+                          </a:solidFill>
+                          <a:latin typeface="Pretendard Medium"/>
+                        </a:rPr>
+                        <a:t>뜻</a:t>
+                      </a:r>
+                    </a:p>
+                  </a:txBody>
+                  <a:tcPr marL="101600" marR="101600" marT="76200" marB="76200" anchor="ctr">
+                    <a:solidFill>
+                      <a:srgbClr val="000000"/>
+                    </a:solidFill>
+                    <a:lnL w="0">
+                      <a:noFill/>
+                    </a:lnL>
+                    <a:lnR w="0">
+                      <a:noFill/>
+                    </a:lnR>
+                    <a:lnT w="0">
+                      <a:noFill/>
+                    </a:lnT>
+                    <a:lnB w="0">
+                      <a:noFill/>
+                    </a:lnB>
+                  </a:tcPr>
+                </a:tc>
+              </a:tr>
+              <a:tr h="635000">
+                <a:tc>
+                  <a:txBody>
+                    <a:bodyPr/>
+                    <a:lstStyle/>
+                    <a:p>
+                      <a:r>
+                        <a:rPr sz="1300" b="1">
+                          <a:solidFill>
+                            <a:srgbClr val="000000"/>
+                          </a:solidFill>
+                          <a:latin typeface="Pretendard"/>
+                        </a:rPr>
+                        <a:t>e37375263</a:t>
+                      </a:r>
+                    </a:p>
+                  </a:txBody>
+                  <a:tcPr marL="101600" marR="101600" marT="101600" marB="101600" anchor="ctr">
+                    <a:solidFill>
+                      <a:srgbClr val="FFFFFF"/>
+                    </a:solidFill>
+                    <a:lnL w="0">
+                      <a:noFill/>
+                    </a:lnL>
+                    <a:lnR w="0">
+                      <a:noFill/>
+                    </a:lnR>
+                    <a:lnT w="0">
+                      <a:noFill/>
+                    </a:lnT>
+                    <a:lnB w="9525">
+                      <a:solidFill>
+                        <a:srgbClr val="E2E2E2"/>
+                      </a:solidFill>
+                    </a:lnB>
+                  </a:tcPr>
+                </a:tc>
+                <a:tc>
+                  <a:txBody>
+                    <a:bodyPr/>
+                    <a:lstStyle/>
+                    <a:p>
+                      <a:r>
+                        <a:rPr sz="1300" b="0">
+                          <a:solidFill>
+                            <a:srgbClr val="5E5E5E"/>
+                          </a:solidFill>
+                          <a:latin typeface="Pretendard Medium"/>
+                        </a:rPr>
+                        <a:t>소속 OSM 도로(way) 번호</a:t>
+                      </a:r>
+                    </a:p>
+                  </a:txBody>
+                  <a:tcPr marL="101600" marR="101600" marT="101600" marB="101600" anchor="ctr">
+                    <a:solidFill>
+                      <a:srgbClr val="FFFFFF"/>
+                    </a:solidFill>
+                    <a:lnL w="0">
+                      <a:noFill/>
+                    </a:lnL>
+                    <a:lnR w="0">
+                      <a:noFill/>
+                    </a:lnR>
+                    <a:lnT w="0">
+                      <a:noFill/>
+                    </a:lnT>
+                    <a:lnB w="9525">
+                      <a:solidFill>
+                        <a:srgbClr val="E2E2E2"/>
+                      </a:solidFill>
+                    </a:lnB>
+                  </a:tcPr>
+                </a:tc>
+              </a:tr>
+              <a:tr h="635000">
+                <a:tc>
+                  <a:txBody>
+                    <a:bodyPr/>
+                    <a:lstStyle/>
+                    <a:p>
+                      <a:r>
+                        <a:rPr sz="1300" b="1">
+                          <a:solidFill>
+                            <a:srgbClr val="000000"/>
+                          </a:solidFill>
+                          <a:latin typeface="Pretendard"/>
+                        </a:rPr>
+                        <a:t>f</a:t>
+                      </a:r>
+                    </a:p>
+                  </a:txBody>
+                  <a:tcPr marL="101600" marR="101600" marT="101600" marB="101600" anchor="ctr">
+                    <a:solidFill>
+                      <a:srgbClr val="FFFFFF"/>
+                    </a:solidFill>
+                    <a:lnL w="0">
+                      <a:noFill/>
+                    </a:lnL>
+                    <a:lnR w="0">
+                      <a:noFill/>
+                    </a:lnR>
+                    <a:lnT w="0">
+                      <a:noFill/>
+                    </a:lnT>
+                    <a:lnB w="9525">
+                      <a:solidFill>
+                        <a:srgbClr val="E2E2E2"/>
+                      </a:solidFill>
+                    </a:lnB>
+                  </a:tcPr>
+                </a:tc>
+                <a:tc>
+                  <a:txBody>
+                    <a:bodyPr/>
+                    <a:lstStyle/>
+                    <a:p>
+                      <a:r>
+                        <a:rPr sz="1300" b="0">
+                          <a:solidFill>
+                            <a:srgbClr val="5E5E5E"/>
+                          </a:solidFill>
+                          <a:latin typeface="Pretendard Medium"/>
+                        </a:rPr>
+                        <a:t>방향 — f 정방향, r 역방향</a:t>
+                      </a:r>
+                    </a:p>
+                  </a:txBody>
+                  <a:tcPr marL="101600" marR="101600" marT="101600" marB="101600" anchor="ctr">
+                    <a:solidFill>
+                      <a:srgbClr val="FFFFFF"/>
+                    </a:solidFill>
+                    <a:lnL w="0">
+                      <a:noFill/>
+                    </a:lnL>
+                    <a:lnR w="0">
+                      <a:noFill/>
+                    </a:lnR>
+                    <a:lnT w="0">
+                      <a:noFill/>
+                    </a:lnT>
+                    <a:lnB w="9525">
+                      <a:solidFill>
+                        <a:srgbClr val="E2E2E2"/>
+                      </a:solidFill>
+                    </a:lnB>
+                  </a:tcPr>
+                </a:tc>
+              </a:tr>
+              <a:tr h="635000">
+                <a:tc>
+                  <a:txBody>
+                    <a:bodyPr/>
+                    <a:lstStyle/>
+                    <a:p>
+                      <a:r>
+                        <a:rPr sz="1300" b="1">
+                          <a:solidFill>
+                            <a:srgbClr val="000000"/>
+                          </a:solidFill>
+                          <a:latin typeface="Pretendard"/>
+                        </a:rPr>
+                        <a:t>445273230</a:t>
+                      </a:r>
+                    </a:p>
+                  </a:txBody>
+                  <a:tcPr marL="101600" marR="101600" marT="101600" marB="101600" anchor="ctr">
+                    <a:solidFill>
+                      <a:srgbClr val="FFFFFF"/>
+                    </a:solidFill>
+                    <a:lnL w="0">
+                      <a:noFill/>
+                    </a:lnL>
+                    <a:lnR w="0">
+                      <a:noFill/>
+                    </a:lnR>
+                    <a:lnT w="0">
+                      <a:noFill/>
+                    </a:lnT>
+                    <a:lnB w="9525">
+                      <a:solidFill>
+                        <a:srgbClr val="E2E2E2"/>
+                      </a:solidFill>
+                    </a:lnB>
+                  </a:tcPr>
+                </a:tc>
+                <a:tc>
+                  <a:txBody>
+                    <a:bodyPr/>
+                    <a:lstStyle/>
+                    <a:p>
+                      <a:r>
+                        <a:rPr sz="1300" b="0">
+                          <a:solidFill>
+                            <a:srgbClr val="5E5E5E"/>
+                          </a:solidFill>
+                          <a:latin typeface="Pretendard Medium"/>
+                        </a:rPr>
+                        <a:t>출발 노드 OSM 번호</a:t>
+                      </a:r>
+                    </a:p>
+                  </a:txBody>
+                  <a:tcPr marL="101600" marR="101600" marT="101600" marB="101600" anchor="ctr">
+                    <a:solidFill>
+                      <a:srgbClr val="FFFFFF"/>
+                    </a:solidFill>
+                    <a:lnL w="0">
+                      <a:noFill/>
+                    </a:lnL>
+                    <a:lnR w="0">
+                      <a:noFill/>
+                    </a:lnR>
+                    <a:lnT w="0">
+                      <a:noFill/>
+                    </a:lnT>
+                    <a:lnB w="9525">
+                      <a:solidFill>
+                        <a:srgbClr val="E2E2E2"/>
+                      </a:solidFill>
+                    </a:lnB>
+                  </a:tcPr>
+                </a:tc>
+              </a:tr>
+              <a:tr h="635000">
+                <a:tc>
+                  <a:txBody>
+                    <a:bodyPr/>
+                    <a:lstStyle/>
+                    <a:p>
+                      <a:r>
+                        <a:rPr sz="1300" b="1">
+                          <a:solidFill>
+                            <a:srgbClr val="000000"/>
+                          </a:solidFill>
+                          <a:latin typeface="Pretendard"/>
+                        </a:rPr>
+                        <a:t>436257996</a:t>
+                      </a:r>
+                    </a:p>
+                  </a:txBody>
+                  <a:tcPr marL="101600" marR="101600" marT="101600" marB="101600" anchor="ctr">
+                    <a:solidFill>
+                      <a:srgbClr val="FFFFFF"/>
+                    </a:solidFill>
+                    <a:lnL w="0">
+                      <a:noFill/>
+                    </a:lnL>
+                    <a:lnR w="0">
+                      <a:noFill/>
+                    </a:lnR>
+                    <a:lnT w="0">
+                      <a:noFill/>
+                    </a:lnT>
+                    <a:lnB w="9525">
+                      <a:solidFill>
+                        <a:srgbClr val="E2E2E2"/>
+                      </a:solidFill>
+                    </a:lnB>
+                  </a:tcPr>
+                </a:tc>
+                <a:tc>
+                  <a:txBody>
+                    <a:bodyPr/>
+                    <a:lstStyle/>
+                    <a:p>
+                      <a:r>
+                        <a:rPr sz="1300" b="0">
+                          <a:solidFill>
+                            <a:srgbClr val="5E5E5E"/>
+                          </a:solidFill>
+                          <a:latin typeface="Pretendard Medium"/>
+                        </a:rPr>
+                        <a:t>도착 노드 OSM 번호</a:t>
+                      </a:r>
+                    </a:p>
+                  </a:txBody>
+                  <a:tcPr marL="101600" marR="101600" marT="101600" marB="101600" anchor="ctr">
+                    <a:solidFill>
+                      <a:srgbClr val="FFFFFF"/>
+                    </a:solidFill>
+                    <a:lnL w="0">
+                      <a:noFill/>
+                    </a:lnL>
+                    <a:lnR w="0">
+                      <a:noFill/>
+                    </a:lnR>
+                    <a:lnT w="0">
+                      <a:noFill/>
+                    </a:lnT>
+                    <a:lnB w="9525">
+                      <a:solidFill>
+                        <a:srgbClr val="E2E2E2"/>
+                      </a:solidFill>
+                    </a:lnB>
+                  </a:tcPr>
+                </a:tc>
+              </a:tr>
+            </a:tbl>
+          </a:graphicData>
+        </a:graphic>
+      </p:graphicFrame>
       <p:sp>
         <p:nvSpPr>
           <p:cNvPr id="25" name="Slide Number Placeholder 0"/>
@@ -5124,7 +5596,7 @@
             <a:pPr algn="r"/>
             <a:fld id="{F7021451-1387-4CA6-816F-3879F97B5CBC}" type="slidenum">
               <a:rPr b="0" lang="en-US"/>
-              <a:t>1004</a:t>
+              <a:t>1008</a:t>
             </a:fld>
             <a:endParaRPr lang="en-US"/>
           </a:p>
@@ -5164,7 +5636,7 @@
           <a:lstStyle/>
           <a:p>
             <a:r>
-              <a:t>3.3 방향 f와 r</a:t>
+              <a:t>3.2 짐작한 규칙은 그 자리에서 검증</a:t>
             </a:r>
           </a:p>
         </p:txBody>
@@ -5207,25 +5679,31 @@
           <a:p>
             <a:pPr/>
             <a:r>
-              <a:t>양방향 도로 = f 행 + r 행 두 줄</a:t>
+              <a:t>검증 대상: 파싱 결과가 실제 양 끝인지</a:t>
+            </a:r>
+          </a:p>
+          <a:p>
+            <a:pPr lvl="1"/>
+            <a:r>
+              <a:t>대조 자료: osm_node_seq_json의 첫 원소와 마지막 원소</a:t>
+            </a:r>
+          </a:p>
+          <a:p>
+            <a:pPr lvl="1"/>
+            <a:r>
+              <a:t>결과: 2,000건 중 불일치 0건</a:t>
             </a:r>
           </a:p>
           <a:p>
             <a:pPr/>
             <a:r>
-              <a:t>일방통행 2,413개, 나머지는 양방향</a:t>
+              <a:t>검증 생략 시 — 몇 주 뒤 원인 불명의 경로</a:t>
             </a:r>
           </a:p>
           <a:p>
             <a:pPr/>
             <a:r>
-              <a:t>처리 방법: 각 행을 단방향 엣지로 취급</a:t>
-            </a:r>
-          </a:p>
-          <a:p>
-            <a:pPr/>
-            <a:r>
-              <a:t>별도 역방향 생성 불필요</a:t>
+              <a:t>이 과목의 데이터 태도: 짐작 직후 검증</a:t>
             </a:r>
           </a:p>
         </p:txBody>
@@ -5298,12 +5776,12 @@
       <p:grpSpPr/>
       <p:sp>
         <p:nvSpPr>
-          <p:cNvPr id="2" name="Text Placeholder 1"/>
-          <p:cNvSpPr>
-            <a:spLocks noGrp="1"/>
-          </p:cNvSpPr>
-          <p:nvPr>
-            <p:ph type="body" idx="100"/>
+          <p:cNvPr id="2" name="Title 1"/>
+          <p:cNvSpPr>
+            <a:spLocks noGrp="1"/>
+          </p:cNvSpPr>
+          <p:nvPr>
+            <p:ph type="title" idx="100"/>
           </p:nvPr>
         </p:nvSpPr>
         <p:spPr/>
@@ -5312,19 +5790,19 @@
           <a:lstStyle/>
           <a:p>
             <a:r>
-              <a:t>04</a:t>
-            </a:r>
-          </a:p>
-        </p:txBody>
-      </p:sp>
-      <p:sp>
-        <p:nvSpPr>
-          <p:cNvPr id="3" name="Title 2"/>
-          <p:cNvSpPr>
-            <a:spLocks noGrp="1"/>
-          </p:cNvSpPr>
-          <p:nvPr>
-            <p:ph type="title" idx="101"/>
+              <a:t>3.3 방향 f와 r</a:t>
+            </a:r>
+          </a:p>
+        </p:txBody>
+      </p:sp>
+      <p:sp>
+        <p:nvSpPr>
+          <p:cNvPr id="3" name="Text Placeholder 2"/>
+          <p:cNvSpPr>
+            <a:spLocks noGrp="1"/>
+          </p:cNvSpPr>
+          <p:nvPr>
+            <p:ph type="body" idx="101"/>
           </p:nvPr>
         </p:nvSpPr>
         <p:spPr/>
@@ -5333,7 +5811,7 @@
           <a:lstStyle/>
           <a:p>
             <a:r>
-              <a:t>교재 2.3 통행수단 필터</a:t>
+              <a:t>3. 교재 2.2 양 끝 노드 찾기</a:t>
             </a:r>
           </a:p>
         </p:txBody>
@@ -5353,40 +5831,76 @@
           <a:bodyPr/>
           <a:lstStyle/>
           <a:p>
-            <a:pPr>
-              <a:spcAft>
-                <a:spcPts val="1000"/>
-              </a:spcAft>
-            </a:pPr>
-            <a:r>
-              <a:rPr>
+            <a:pPr/>
+            <a:r>
+              <a:t>양방향 도로 = f 행 + r 행 두 줄</a:t>
+            </a:r>
+          </a:p>
+          <a:p>
+            <a:pPr/>
+            <a:r>
+              <a:t>일방통행 2,413개, 나머지는 양방향</a:t>
+            </a:r>
+          </a:p>
+          <a:p>
+            <a:pPr/>
+            <a:r>
+              <a:t>처리 방법: 각 행을 단방향 엣지로 취급</a:t>
+            </a:r>
+          </a:p>
+          <a:p>
+            <a:pPr/>
+            <a:r>
+              <a:t>별도 역방향 생성 불필요</a:t>
+            </a:r>
+          </a:p>
+        </p:txBody>
+      </p:sp>
+      <p:sp>
+        <p:nvSpPr>
+          <p:cNvPr id="25" name="Slide Number Placeholder 0"/>
+          <p:cNvSpPr>
+            <a:spLocks noGrp="1"/>
+          </p:cNvSpPr>
+          <p:nvPr>
+            <p:ph type="sldNum" sz="quarter" idx="4294967295"/>
+          </p:nvPr>
+        </p:nvSpPr>
+        <p:spPr>
+          <a:xfrm>
+            <a:off x="10591495" y="6355080"/>
+            <a:ext cx="914400" cy="274320"/>
+          </a:xfrm>
+          <a:prstGeom prst="rect">
+            <a:avLst/>
+          </a:prstGeom>
+          <a:extLst>
+            <a:ext uri="{C572A759-6A51-4108-AA02-DFA0A04FC94B}">
+              <ma14:wrappingTextBoxFlag xmlns:ma14="http://schemas.microsoft.com/office/mac/drawingml/2011/main" val="0"/>
+            </a:ext>
+          </a:extLst>
+        </p:spPr>
+        <p:txBody>
+          <a:bodyPr/>
+          <a:lstStyle>
+            <a:lvl1pPr>
+              <a:defRPr sz="1000">
                 <a:solidFill>
                   <a:srgbClr val="AFAFAF"/>
                 </a:solidFill>
-              </a:rPr>
-              <a:t>4.1  </a:t>
-            </a:r>
-            <a:r>
-              <a:t>엣지 절반은 자동차 통행 불가</a:t>
-            </a:r>
-          </a:p>
-          <a:p>
-            <a:pPr>
-              <a:spcAft>
-                <a:spcPts val="1000"/>
-              </a:spcAft>
-            </a:pPr>
-            <a:r>
-              <a:rPr>
-                <a:solidFill>
-                  <a:srgbClr val="AFAFAF"/>
-                </a:solidFill>
-              </a:rPr>
-              <a:t>4.2  </a:t>
-            </a:r>
-            <a:r>
-              <a:t>필터 적용 전후</a:t>
-            </a:r>
+                <a:latin typeface="Pretendard Medium"/>
+                <a:ea typeface="Pretendard Medium"/>
+                <a:cs typeface="Pretendard Medium"/>
+              </a:defRPr>
+            </a:lvl1pPr>
+          </a:lstStyle>
+          <a:p>
+            <a:pPr algn="r"/>
+            <a:fld id="{F7021451-1387-4CA6-816F-3879F97B5CBC}" type="slidenum">
+              <a:rPr b="0" lang="en-US"/>
+              <a:t>1004</a:t>
+            </a:fld>
+            <a:endParaRPr lang="en-US"/>
           </a:p>
         </p:txBody>
       </p:sp>
@@ -5399,6 +5913,118 @@
 </file>
 
 <file path=ppt/slides/slide13.xml><?xml version="1.0" encoding="utf-8"?>
+<p:sld xmlns:a="http://schemas.openxmlformats.org/drawingml/2006/main" xmlns:p="http://schemas.openxmlformats.org/presentationml/2006/main" xmlns:r="http://schemas.openxmlformats.org/officeDocument/2006/relationships">
+  <p:cSld>
+    <p:spTree>
+      <p:nvGrpSpPr>
+        <p:cNvPr id="1" name=""/>
+        <p:cNvGrpSpPr/>
+        <p:nvPr/>
+      </p:nvGrpSpPr>
+      <p:grpSpPr/>
+      <p:sp>
+        <p:nvSpPr>
+          <p:cNvPr id="2" name="Text Placeholder 1"/>
+          <p:cNvSpPr>
+            <a:spLocks noGrp="1"/>
+          </p:cNvSpPr>
+          <p:nvPr>
+            <p:ph type="body" idx="100"/>
+          </p:nvPr>
+        </p:nvSpPr>
+        <p:spPr/>
+        <p:txBody>
+          <a:bodyPr/>
+          <a:lstStyle/>
+          <a:p>
+            <a:r>
+              <a:t>04</a:t>
+            </a:r>
+          </a:p>
+        </p:txBody>
+      </p:sp>
+      <p:sp>
+        <p:nvSpPr>
+          <p:cNvPr id="3" name="Title 2"/>
+          <p:cNvSpPr>
+            <a:spLocks noGrp="1"/>
+          </p:cNvSpPr>
+          <p:nvPr>
+            <p:ph type="title" idx="101"/>
+          </p:nvPr>
+        </p:nvSpPr>
+        <p:spPr/>
+        <p:txBody>
+          <a:bodyPr/>
+          <a:lstStyle/>
+          <a:p>
+            <a:r>
+              <a:t>교재 2.3 통행수단 필터</a:t>
+            </a:r>
+          </a:p>
+        </p:txBody>
+      </p:sp>
+      <p:sp>
+        <p:nvSpPr>
+          <p:cNvPr id="4" name="Text Placeholder 3"/>
+          <p:cNvSpPr>
+            <a:spLocks noGrp="1"/>
+          </p:cNvSpPr>
+          <p:nvPr>
+            <p:ph type="body" idx="102"/>
+          </p:nvPr>
+        </p:nvSpPr>
+        <p:spPr/>
+        <p:txBody>
+          <a:bodyPr/>
+          <a:lstStyle/>
+          <a:p>
+            <a:pPr>
+              <a:spcAft>
+                <a:spcPts val="1000"/>
+              </a:spcAft>
+            </a:pPr>
+            <a:r>
+              <a:rPr>
+                <a:solidFill>
+                  <a:srgbClr val="AFAFAF"/>
+                </a:solidFill>
+              </a:rPr>
+              <a:t>4.1  </a:t>
+            </a:r>
+            <a:r>
+              <a:t>엣지 절반은 자동차 통행 불가</a:t>
+            </a:r>
+          </a:p>
+          <a:p>
+            <a:pPr>
+              <a:spcAft>
+                <a:spcPts val="1000"/>
+              </a:spcAft>
+            </a:pPr>
+            <a:r>
+              <a:rPr>
+                <a:solidFill>
+                  <a:srgbClr val="AFAFAF"/>
+                </a:solidFill>
+              </a:rPr>
+              <a:t>4.2  </a:t>
+            </a:r>
+            <a:r>
+              <a:t>필터 적용 전후</a:t>
+            </a:r>
+          </a:p>
+        </p:txBody>
+      </p:sp>
+    </p:spTree>
+  </p:cSld>
+  <p:clrMapOvr>
+    <a:masterClrMapping/>
+  </p:clrMapOvr>
+</p:sld>
+</file>
+
+<file path=ppt/slides/slide14.xml><?xml version="1.0" encoding="utf-8"?>
 <p:sld xmlns:a="http://schemas.openxmlformats.org/drawingml/2006/main" xmlns:p="http://schemas.openxmlformats.org/presentationml/2006/main" xmlns:r="http://schemas.openxmlformats.org/officeDocument/2006/relationships">
   <p:cSld>
     <p:spTree>
@@ -5551,7 +6177,7 @@
 </p:sld>
 </file>
 
-<file path=ppt/slides/slide14.xml><?xml version="1.0" encoding="utf-8"?>
+<file path=ppt/slides/slide15.xml><?xml version="1.0" encoding="utf-8"?>
 <p:sld xmlns:a="http://schemas.openxmlformats.org/drawingml/2006/main" xmlns:p="http://schemas.openxmlformats.org/presentationml/2006/main" xmlns:r="http://schemas.openxmlformats.org/officeDocument/2006/relationships">
   <p:cSld>
     <p:spTree>
@@ -5659,7 +6285,7 @@
           <a:lstStyle/>
           <a:p>
             <a:r>
-              <a:t>표 3. DRIVE 필터 적용에 따른 도로망 규모 변화</a:t>
+              <a:t>표 4. DRIVE 필터 적용에 따른 도로망 규모 변화</a:t>
             </a:r>
           </a:p>
         </p:txBody>
@@ -6071,118 +6697,6 @@
 </p:sld>
 </file>
 
-<file path=ppt/slides/slide15.xml><?xml version="1.0" encoding="utf-8"?>
-<p:sld xmlns:a="http://schemas.openxmlformats.org/drawingml/2006/main" xmlns:p="http://schemas.openxmlformats.org/presentationml/2006/main" xmlns:r="http://schemas.openxmlformats.org/officeDocument/2006/relationships">
-  <p:cSld>
-    <p:spTree>
-      <p:nvGrpSpPr>
-        <p:cNvPr id="1" name=""/>
-        <p:cNvGrpSpPr/>
-        <p:nvPr/>
-      </p:nvGrpSpPr>
-      <p:grpSpPr/>
-      <p:sp>
-        <p:nvSpPr>
-          <p:cNvPr id="2" name="Text Placeholder 1"/>
-          <p:cNvSpPr>
-            <a:spLocks noGrp="1"/>
-          </p:cNvSpPr>
-          <p:nvPr>
-            <p:ph type="body" idx="100"/>
-          </p:nvPr>
-        </p:nvSpPr>
-        <p:spPr/>
-        <p:txBody>
-          <a:bodyPr/>
-          <a:lstStyle/>
-          <a:p>
-            <a:r>
-              <a:t>05</a:t>
-            </a:r>
-          </a:p>
-        </p:txBody>
-      </p:sp>
-      <p:sp>
-        <p:nvSpPr>
-          <p:cNvPr id="3" name="Title 2"/>
-          <p:cNvSpPr>
-            <a:spLocks noGrp="1"/>
-          </p:cNvSpPr>
-          <p:nvPr>
-            <p:ph type="title" idx="101"/>
-          </p:nvPr>
-        </p:nvSpPr>
-        <p:spPr/>
-        <p:txBody>
-          <a:bodyPr/>
-          <a:lstStyle/>
-          <a:p>
-            <a:r>
-              <a:t>교재 2.4–2.5 인접 리스트와 스냅</a:t>
-            </a:r>
-          </a:p>
-        </p:txBody>
-      </p:sp>
-      <p:sp>
-        <p:nvSpPr>
-          <p:cNvPr id="4" name="Text Placeholder 3"/>
-          <p:cNvSpPr>
-            <a:spLocks noGrp="1"/>
-          </p:cNvSpPr>
-          <p:nvPr>
-            <p:ph type="body" idx="102"/>
-          </p:nvPr>
-        </p:nvSpPr>
-        <p:spPr/>
-        <p:txBody>
-          <a:bodyPr/>
-          <a:lstStyle/>
-          <a:p>
-            <a:pPr>
-              <a:spcAft>
-                <a:spcPts val="1000"/>
-              </a:spcAft>
-            </a:pPr>
-            <a:r>
-              <a:rPr>
-                <a:solidFill>
-                  <a:srgbClr val="AFAFAF"/>
-                </a:solidFill>
-              </a:rPr>
-              <a:t>5.1  </a:t>
-            </a:r>
-            <a:r>
-              <a:t>비용은 거리가 아니라 소요시간</a:t>
-            </a:r>
-          </a:p>
-          <a:p>
-            <a:pPr>
-              <a:spcAft>
-                <a:spcPts val="1000"/>
-              </a:spcAft>
-            </a:pPr>
-            <a:r>
-              <a:rPr>
-                <a:solidFill>
-                  <a:srgbClr val="AFAFAF"/>
-                </a:solidFill>
-              </a:rPr>
-              <a:t>5.2  </a:t>
-            </a:r>
-            <a:r>
-              <a:t>좌표의 최근접 노드 탐색</a:t>
-            </a:r>
-          </a:p>
-        </p:txBody>
-      </p:sp>
-    </p:spTree>
-  </p:cSld>
-  <p:clrMapOvr>
-    <a:masterClrMapping/>
-  </p:clrMapOvr>
-</p:sld>
-</file>
-
 <file path=ppt/slides/slide16.xml><?xml version="1.0" encoding="utf-8"?>
 <p:sld xmlns:a="http://schemas.openxmlformats.org/drawingml/2006/main" xmlns:p="http://schemas.openxmlformats.org/presentationml/2006/main" xmlns:r="http://schemas.openxmlformats.org/officeDocument/2006/relationships">
   <p:cSld>
@@ -6195,12 +6709,12 @@
       <p:grpSpPr/>
       <p:sp>
         <p:nvSpPr>
-          <p:cNvPr id="2" name="Title 1"/>
-          <p:cNvSpPr>
-            <a:spLocks noGrp="1"/>
-          </p:cNvSpPr>
-          <p:nvPr>
-            <p:ph type="title" idx="100"/>
+          <p:cNvPr id="2" name="Text Placeholder 1"/>
+          <p:cNvSpPr>
+            <a:spLocks noGrp="1"/>
+          </p:cNvSpPr>
+          <p:nvPr>
+            <p:ph type="body" idx="100"/>
           </p:nvPr>
         </p:nvSpPr>
         <p:spPr/>
@@ -6209,19 +6723,19 @@
           <a:lstStyle/>
           <a:p>
             <a:r>
-              <a:t>5.1 비용은 거리가 아니라 소요시간</a:t>
-            </a:r>
-          </a:p>
-        </p:txBody>
-      </p:sp>
-      <p:sp>
-        <p:nvSpPr>
-          <p:cNvPr id="3" name="Text Placeholder 2"/>
-          <p:cNvSpPr>
-            <a:spLocks noGrp="1"/>
-          </p:cNvSpPr>
-          <p:nvPr>
-            <p:ph type="body" idx="101"/>
+              <a:t>05</a:t>
+            </a:r>
+          </a:p>
+        </p:txBody>
+      </p:sp>
+      <p:sp>
+        <p:nvSpPr>
+          <p:cNvPr id="3" name="Title 2"/>
+          <p:cNvSpPr>
+            <a:spLocks noGrp="1"/>
+          </p:cNvSpPr>
+          <p:nvPr>
+            <p:ph type="title" idx="101"/>
           </p:nvPr>
         </p:nvSpPr>
         <p:spPr/>
@@ -6230,7 +6744,7 @@
           <a:lstStyle/>
           <a:p>
             <a:r>
-              <a:t>5. 교재 2.4–2.5 인접 리스트와 스냅</a:t>
+              <a:t>교재 2.4–2.5 인접 리스트와 스냅</a:t>
             </a:r>
           </a:p>
         </p:txBody>
@@ -6250,33 +6764,69 @@
           <a:bodyPr/>
           <a:lstStyle/>
           <a:p>
-            <a:pPr/>
-            <a:r>
-              <a:t>인접 리스트: 노드별 나가는 엣지 목록</a:t>
-            </a:r>
-          </a:p>
-          <a:p>
-            <a:pPr/>
-            <a:r>
-              <a:t>목적: 매번 표를 훑지 않고 이웃 조회</a:t>
-            </a:r>
-          </a:p>
-          <a:p>
-            <a:pPr/>
-            <a:r>
-              <a:t>경계에서 잘린 엣지는 제외</a:t>
-            </a:r>
-          </a:p>
-        </p:txBody>
-      </p:sp>
-      <p:sp>
-        <p:nvSpPr>
-          <p:cNvPr id="5" name="Text Placeholder 4"/>
-          <p:cNvSpPr>
-            <a:spLocks noGrp="1"/>
-          </p:cNvSpPr>
-          <p:nvPr>
-            <p:ph type="body" idx="103"/>
+            <a:pPr>
+              <a:spcAft>
+                <a:spcPts val="1000"/>
+              </a:spcAft>
+            </a:pPr>
+            <a:r>
+              <a:rPr>
+                <a:solidFill>
+                  <a:srgbClr val="AFAFAF"/>
+                </a:solidFill>
+              </a:rPr>
+              <a:t>5.1  </a:t>
+            </a:r>
+            <a:r>
+              <a:t>비용은 거리가 아니라 소요시간</a:t>
+            </a:r>
+          </a:p>
+          <a:p>
+            <a:pPr>
+              <a:spcAft>
+                <a:spcPts val="1000"/>
+              </a:spcAft>
+            </a:pPr>
+            <a:r>
+              <a:rPr>
+                <a:solidFill>
+                  <a:srgbClr val="AFAFAF"/>
+                </a:solidFill>
+              </a:rPr>
+              <a:t>5.2  </a:t>
+            </a:r>
+            <a:r>
+              <a:t>좌표의 최근접 노드 탐색</a:t>
+            </a:r>
+          </a:p>
+        </p:txBody>
+      </p:sp>
+    </p:spTree>
+  </p:cSld>
+  <p:clrMapOvr>
+    <a:masterClrMapping/>
+  </p:clrMapOvr>
+</p:sld>
+</file>
+
+<file path=ppt/slides/slide17.xml><?xml version="1.0" encoding="utf-8"?>
+<p:sld xmlns:a="http://schemas.openxmlformats.org/drawingml/2006/main" xmlns:p="http://schemas.openxmlformats.org/presentationml/2006/main" xmlns:r="http://schemas.openxmlformats.org/officeDocument/2006/relationships">
+  <p:cSld>
+    <p:spTree>
+      <p:nvGrpSpPr>
+        <p:cNvPr id="1" name=""/>
+        <p:cNvGrpSpPr/>
+        <p:nvPr/>
+      </p:nvGrpSpPr>
+      <p:grpSpPr/>
+      <p:sp>
+        <p:nvSpPr>
+          <p:cNvPr id="2" name="Title 1"/>
+          <p:cNvSpPr>
+            <a:spLocks noGrp="1"/>
+          </p:cNvSpPr>
+          <p:nvPr>
+            <p:ph type="title" idx="100"/>
           </p:nvPr>
         </p:nvSpPr>
         <p:spPr/>
@@ -6285,7 +6835,83 @@
           <a:lstStyle/>
           <a:p>
             <a:r>
-              <a:t>표 4. 같은 200 m 구간의 도로 종류별 소요시간</a:t>
+              <a:t>5.1 비용은 거리가 아니라 소요시간</a:t>
+            </a:r>
+          </a:p>
+        </p:txBody>
+      </p:sp>
+      <p:sp>
+        <p:nvSpPr>
+          <p:cNvPr id="3" name="Text Placeholder 2"/>
+          <p:cNvSpPr>
+            <a:spLocks noGrp="1"/>
+          </p:cNvSpPr>
+          <p:nvPr>
+            <p:ph type="body" idx="101"/>
+          </p:nvPr>
+        </p:nvSpPr>
+        <p:spPr/>
+        <p:txBody>
+          <a:bodyPr/>
+          <a:lstStyle/>
+          <a:p>
+            <a:r>
+              <a:t>5. 교재 2.4–2.5 인접 리스트와 스냅</a:t>
+            </a:r>
+          </a:p>
+        </p:txBody>
+      </p:sp>
+      <p:sp>
+        <p:nvSpPr>
+          <p:cNvPr id="4" name="Text Placeholder 3"/>
+          <p:cNvSpPr>
+            <a:spLocks noGrp="1"/>
+          </p:cNvSpPr>
+          <p:nvPr>
+            <p:ph type="body" idx="102"/>
+          </p:nvPr>
+        </p:nvSpPr>
+        <p:spPr/>
+        <p:txBody>
+          <a:bodyPr/>
+          <a:lstStyle/>
+          <a:p>
+            <a:pPr/>
+            <a:r>
+              <a:t>인접 리스트: 노드별 나가는 엣지 목록</a:t>
+            </a:r>
+          </a:p>
+          <a:p>
+            <a:pPr/>
+            <a:r>
+              <a:t>목적: 매번 표를 훑지 않고 이웃 조회</a:t>
+            </a:r>
+          </a:p>
+          <a:p>
+            <a:pPr/>
+            <a:r>
+              <a:t>경계에서 잘린 엣지는 제외</a:t>
+            </a:r>
+          </a:p>
+        </p:txBody>
+      </p:sp>
+      <p:sp>
+        <p:nvSpPr>
+          <p:cNvPr id="5" name="Text Placeholder 4"/>
+          <p:cNvSpPr>
+            <a:spLocks noGrp="1"/>
+          </p:cNvSpPr>
+          <p:nvPr>
+            <p:ph type="body" idx="103"/>
+          </p:nvPr>
+        </p:nvSpPr>
+        <p:spPr/>
+        <p:txBody>
+          <a:bodyPr/>
+          <a:lstStyle/>
+          <a:p>
+            <a:r>
+              <a:t>표 5. 같은 200 m 구간의 도로 종류별 소요시간</a:t>
             </a:r>
           </a:p>
         </p:txBody>
@@ -6804,7 +7430,7 @@
 </p:sld>
 </file>
 
-<file path=ppt/slides/slide17.xml><?xml version="1.0" encoding="utf-8"?>
+<file path=ppt/slides/slide18.xml><?xml version="1.0" encoding="utf-8"?>
 <p:sld xmlns:a="http://schemas.openxmlformats.org/drawingml/2006/main" xmlns:p="http://schemas.openxmlformats.org/presentationml/2006/main" xmlns:r="http://schemas.openxmlformats.org/officeDocument/2006/relationships">
   <p:cSld>
     <p:spTree>
@@ -6997,118 +7623,6 @@
 </p:sld>
 </file>
 
-<file path=ppt/slides/slide18.xml><?xml version="1.0" encoding="utf-8"?>
-<p:sld xmlns:a="http://schemas.openxmlformats.org/drawingml/2006/main" xmlns:p="http://schemas.openxmlformats.org/presentationml/2006/main" xmlns:r="http://schemas.openxmlformats.org/officeDocument/2006/relationships">
-  <p:cSld>
-    <p:spTree>
-      <p:nvGrpSpPr>
-        <p:cNvPr id="1" name=""/>
-        <p:cNvGrpSpPr/>
-        <p:nvPr/>
-      </p:nvGrpSpPr>
-      <p:grpSpPr/>
-      <p:sp>
-        <p:nvSpPr>
-          <p:cNvPr id="2" name="Text Placeholder 1"/>
-          <p:cNvSpPr>
-            <a:spLocks noGrp="1"/>
-          </p:cNvSpPr>
-          <p:nvPr>
-            <p:ph type="body" idx="100"/>
-          </p:nvPr>
-        </p:nvSpPr>
-        <p:spPr/>
-        <p:txBody>
-          <a:bodyPr/>
-          <a:lstStyle/>
-          <a:p>
-            <a:r>
-              <a:t>06</a:t>
-            </a:r>
-          </a:p>
-        </p:txBody>
-      </p:sp>
-      <p:sp>
-        <p:nvSpPr>
-          <p:cNvPr id="3" name="Title 2"/>
-          <p:cNvSpPr>
-            <a:spLocks noGrp="1"/>
-          </p:cNvSpPr>
-          <p:nvPr>
-            <p:ph type="title" idx="101"/>
-          </p:nvPr>
-        </p:nvSpPr>
-        <p:spPr/>
-        <p:txBody>
-          <a:bodyPr/>
-          <a:lstStyle/>
-          <a:p>
-            <a:r>
-              <a:t>교재 2.6 실습과 정리</a:t>
-            </a:r>
-          </a:p>
-        </p:txBody>
-      </p:sp>
-      <p:sp>
-        <p:nvSpPr>
-          <p:cNvPr id="4" name="Text Placeholder 3"/>
-          <p:cNvSpPr>
-            <a:spLocks noGrp="1"/>
-          </p:cNvSpPr>
-          <p:nvPr>
-            <p:ph type="body" idx="102"/>
-          </p:nvPr>
-        </p:nvSpPr>
-        <p:spPr/>
-        <p:txBody>
-          <a:bodyPr/>
-          <a:lstStyle/>
-          <a:p>
-            <a:pPr>
-              <a:spcAft>
-                <a:spcPts val="1000"/>
-              </a:spcAft>
-            </a:pPr>
-            <a:r>
-              <a:rPr>
-                <a:solidFill>
-                  <a:srgbClr val="AFAFAF"/>
-                </a:solidFill>
-              </a:rPr>
-              <a:t>6.1  </a:t>
-            </a:r>
-            <a:r>
-              <a:t>도로망 한 장 요약</a:t>
-            </a:r>
-          </a:p>
-          <a:p>
-            <a:pPr>
-              <a:spcAft>
-                <a:spcPts val="1000"/>
-              </a:spcAft>
-            </a:pPr>
-            <a:r>
-              <a:rPr>
-                <a:solidFill>
-                  <a:srgbClr val="AFAFAF"/>
-                </a:solidFill>
-              </a:rPr>
-              <a:t>6.2  </a:t>
-            </a:r>
-            <a:r>
-              <a:t>정리와 과제</a:t>
-            </a:r>
-          </a:p>
-        </p:txBody>
-      </p:sp>
-    </p:spTree>
-  </p:cSld>
-  <p:clrMapOvr>
-    <a:masterClrMapping/>
-  </p:clrMapOvr>
-</p:sld>
-</file>
-
 <file path=ppt/slides/slide19.xml><?xml version="1.0" encoding="utf-8"?>
 <p:sld xmlns:a="http://schemas.openxmlformats.org/drawingml/2006/main" xmlns:p="http://schemas.openxmlformats.org/presentationml/2006/main" xmlns:r="http://schemas.openxmlformats.org/officeDocument/2006/relationships">
   <p:cSld>
@@ -7121,12 +7635,12 @@
       <p:grpSpPr/>
       <p:sp>
         <p:nvSpPr>
-          <p:cNvPr id="2" name="Title 1"/>
-          <p:cNvSpPr>
-            <a:spLocks noGrp="1"/>
-          </p:cNvSpPr>
-          <p:nvPr>
-            <p:ph type="title" idx="100"/>
+          <p:cNvPr id="2" name="Text Placeholder 1"/>
+          <p:cNvSpPr>
+            <a:spLocks noGrp="1"/>
+          </p:cNvSpPr>
+          <p:nvPr>
+            <p:ph type="body" idx="100"/>
           </p:nvPr>
         </p:nvSpPr>
         <p:spPr/>
@@ -7135,19 +7649,19 @@
           <a:lstStyle/>
           <a:p>
             <a:r>
-              <a:t>6.1 도로망 한 장 요약</a:t>
-            </a:r>
-          </a:p>
-        </p:txBody>
-      </p:sp>
-      <p:sp>
-        <p:nvSpPr>
-          <p:cNvPr id="3" name="Text Placeholder 2"/>
-          <p:cNvSpPr>
-            <a:spLocks noGrp="1"/>
-          </p:cNvSpPr>
-          <p:nvPr>
-            <p:ph type="body" idx="101"/>
+              <a:t>06</a:t>
+            </a:r>
+          </a:p>
+        </p:txBody>
+      </p:sp>
+      <p:sp>
+        <p:nvSpPr>
+          <p:cNvPr id="3" name="Title 2"/>
+          <p:cNvSpPr>
+            <a:spLocks noGrp="1"/>
+          </p:cNvSpPr>
+          <p:nvPr>
+            <p:ph type="title" idx="101"/>
           </p:nvPr>
         </p:nvSpPr>
         <p:spPr/>
@@ -7156,7 +7670,7 @@
           <a:lstStyle/>
           <a:p>
             <a:r>
-              <a:t>6. 교재 2.6 실습과 정리</a:t>
+              <a:t>교재 2.6 실습과 정리</a:t>
             </a:r>
           </a:p>
         </p:txBody>
@@ -7176,33 +7690,69 @@
           <a:bodyPr/>
           <a:lstStyle/>
           <a:p>
-            <a:pPr/>
-            <a:r>
-              <a:t>산출 순서: 필터 → 인접 리스트 → 대조 → 요약</a:t>
-            </a:r>
-          </a:p>
-          <a:p>
-            <a:pPr/>
-            <a:r>
-              <a:t>총 연장 불일치 시 DRIVE 집합 재점검</a:t>
-            </a:r>
-          </a:p>
-          <a:p>
-            <a:pPr/>
-            <a:r>
-              <a:t>숫자마다 해석 한 문장 첨부</a:t>
-            </a:r>
-          </a:p>
-        </p:txBody>
-      </p:sp>
-      <p:sp>
-        <p:nvSpPr>
-          <p:cNvPr id="5" name="Text Placeholder 4"/>
-          <p:cNvSpPr>
-            <a:spLocks noGrp="1"/>
-          </p:cNvSpPr>
-          <p:nvPr>
-            <p:ph type="body" idx="103"/>
+            <a:pPr>
+              <a:spcAft>
+                <a:spcPts val="1000"/>
+              </a:spcAft>
+            </a:pPr>
+            <a:r>
+              <a:rPr>
+                <a:solidFill>
+                  <a:srgbClr val="AFAFAF"/>
+                </a:solidFill>
+              </a:rPr>
+              <a:t>6.1  </a:t>
+            </a:r>
+            <a:r>
+              <a:t>도로망 한 장 요약</a:t>
+            </a:r>
+          </a:p>
+          <a:p>
+            <a:pPr>
+              <a:spcAft>
+                <a:spcPts val="1000"/>
+              </a:spcAft>
+            </a:pPr>
+            <a:r>
+              <a:rPr>
+                <a:solidFill>
+                  <a:srgbClr val="AFAFAF"/>
+                </a:solidFill>
+              </a:rPr>
+              <a:t>6.2  </a:t>
+            </a:r>
+            <a:r>
+              <a:t>정리와 과제</a:t>
+            </a:r>
+          </a:p>
+        </p:txBody>
+      </p:sp>
+    </p:spTree>
+  </p:cSld>
+  <p:clrMapOvr>
+    <a:masterClrMapping/>
+  </p:clrMapOvr>
+</p:sld>
+</file>
+
+<file path=ppt/slides/slide2.xml><?xml version="1.0" encoding="utf-8"?>
+<p:sld xmlns:a="http://schemas.openxmlformats.org/drawingml/2006/main" xmlns:p="http://schemas.openxmlformats.org/presentationml/2006/main" xmlns:r="http://schemas.openxmlformats.org/officeDocument/2006/relationships">
+  <p:cSld>
+    <p:spTree>
+      <p:nvGrpSpPr>
+        <p:cNvPr id="1" name=""/>
+        <p:cNvGrpSpPr/>
+        <p:nvPr/>
+      </p:nvGrpSpPr>
+      <p:grpSpPr/>
+      <p:sp>
+        <p:nvSpPr>
+          <p:cNvPr id="2" name="Title 1"/>
+          <p:cNvSpPr>
+            <a:spLocks noGrp="1"/>
+          </p:cNvSpPr>
+          <p:nvPr>
+            <p:ph type="title" idx="100"/>
           </p:nvPr>
         </p:nvSpPr>
         <p:spPr/>
@@ -7211,7 +7761,878 @@
           <a:lstStyle/>
           <a:p>
             <a:r>
-              <a:t>표 5. 하남시 자동차 도로망 요약 지표</a:t>
+              <a:t>강의 목차</a:t>
+            </a:r>
+          </a:p>
+        </p:txBody>
+      </p:sp>
+      <p:sp>
+        <p:nvSpPr>
+          <p:cNvPr id="3" name="Text Placeholder 2"/>
+          <p:cNvSpPr>
+            <a:spLocks noGrp="1"/>
+          </p:cNvSpPr>
+          <p:nvPr>
+            <p:ph type="body" idx="101"/>
+          </p:nvPr>
+        </p:nvSpPr>
+        <p:spPr/>
+        <p:txBody>
+          <a:bodyPr/>
+          <a:lstStyle/>
+          <a:p>
+            <a:r>
+              <a:t>교재 2장</a:t>
+            </a:r>
+          </a:p>
+        </p:txBody>
+      </p:sp>
+      <p:graphicFrame>
+        <p:nvGraphicFramePr>
+          <p:cNvPr id="5" name="Table Placeholder 4"/>
+          <p:cNvGraphicFramePr>
+            <a:graphicFrameLocks noGrp="1"/>
+          </p:cNvGraphicFramePr>
+          <p:nvPr>
+            <p:ph type="tbl" idx="103"/>
+          </p:nvPr>
+        </p:nvGraphicFramePr>
+        <p:xfrm>
+          <a:off x="685800" y="1828800"/>
+          <a:ext cx="10820093" cy="4419600"/>
+        </p:xfrm>
+        <a:graphic>
+          <a:graphicData uri="http://schemas.openxmlformats.org/drawingml/2006/table">
+            <a:tbl>
+              <a:tblPr firstRow="0" bandRow="0" firstCol="0" lastRow="0" lastCol="0" bandCol="0"/>
+              <a:tblGrid>
+                <a:gridCol w="914631"/>
+                <a:gridCol w="2560969"/>
+                <a:gridCol w="7344493"/>
+              </a:tblGrid>
+              <a:tr h="736600">
+                <a:tc>
+                  <a:txBody>
+                    <a:bodyPr/>
+                    <a:lstStyle/>
+                    <a:p>
+                      <a:r>
+                        <a:rPr sz="2600" b="0">
+                          <a:solidFill>
+                            <a:srgbClr val="000000"/>
+                          </a:solidFill>
+                          <a:latin typeface="Pretendard ExtraBold"/>
+                        </a:rPr>
+                        <a:t>01</a:t>
+                      </a:r>
+                    </a:p>
+                  </a:txBody>
+                  <a:tcPr marL="0" marR="101600" marT="127000" marB="127000" anchor="ctr">
+                    <a:solidFill>
+                      <a:srgbClr val="FFFFFF"/>
+                    </a:solidFill>
+                    <a:lnL w="0">
+                      <a:noFill/>
+                    </a:lnL>
+                    <a:lnR w="0">
+                      <a:noFill/>
+                    </a:lnR>
+                    <a:lnT w="0">
+                      <a:noFill/>
+                    </a:lnT>
+                    <a:lnB w="9525">
+                      <a:solidFill>
+                        <a:srgbClr val="E2E2E2"/>
+                      </a:solidFill>
+                    </a:lnB>
+                  </a:tcPr>
+                </a:tc>
+                <a:tc>
+                  <a:txBody>
+                    <a:bodyPr/>
+                    <a:lstStyle/>
+                    <a:p>
+                      <a:r>
+                        <a:rPr sz="1800" b="1">
+                          <a:solidFill>
+                            <a:srgbClr val="000000"/>
+                          </a:solidFill>
+                          <a:latin typeface="Pretendard"/>
+                        </a:rPr>
+                        <a:t>도입과 학습 목표</a:t>
+                      </a:r>
+                    </a:p>
+                  </a:txBody>
+                  <a:tcPr marL="101600" marR="101600" marT="127000" marB="127000" anchor="ctr">
+                    <a:solidFill>
+                      <a:srgbClr val="FFFFFF"/>
+                    </a:solidFill>
+                    <a:lnL w="0">
+                      <a:noFill/>
+                    </a:lnL>
+                    <a:lnR w="0">
+                      <a:noFill/>
+                    </a:lnR>
+                    <a:lnT w="0">
+                      <a:noFill/>
+                    </a:lnT>
+                    <a:lnB w="9525">
+                      <a:solidFill>
+                        <a:srgbClr val="E2E2E2"/>
+                      </a:solidFill>
+                    </a:lnB>
+                  </a:tcPr>
+                </a:tc>
+                <a:tc>
+                  <a:txBody>
+                    <a:bodyPr/>
+                    <a:lstStyle/>
+                    <a:p>
+                      <a:r>
+                        <a:rPr sz="1300" b="0">
+                          <a:solidFill>
+                            <a:srgbClr val="5E5E5E"/>
+                          </a:solidFill>
+                          <a:latin typeface="Pretendard Medium"/>
+                        </a:rPr>
+                        <a:t>1.1 소요시간 계산의 입력 자료  ·  1.2 학습 목표  ·  1.3 교재와 실습을 여는 곳</a:t>
+                      </a:r>
+                    </a:p>
+                  </a:txBody>
+                  <a:tcPr marL="101600" marR="101600" marT="127000" marB="127000" anchor="ctr">
+                    <a:solidFill>
+                      <a:srgbClr val="FFFFFF"/>
+                    </a:solidFill>
+                    <a:lnL w="0">
+                      <a:noFill/>
+                    </a:lnL>
+                    <a:lnR w="0">
+                      <a:noFill/>
+                    </a:lnR>
+                    <a:lnT w="0">
+                      <a:noFill/>
+                    </a:lnT>
+                    <a:lnB w="9525">
+                      <a:solidFill>
+                        <a:srgbClr val="E2E2E2"/>
+                      </a:solidFill>
+                    </a:lnB>
+                  </a:tcPr>
+                </a:tc>
+              </a:tr>
+              <a:tr h="736600">
+                <a:tc>
+                  <a:txBody>
+                    <a:bodyPr/>
+                    <a:lstStyle/>
+                    <a:p>
+                      <a:r>
+                        <a:rPr sz="2600" b="0">
+                          <a:solidFill>
+                            <a:srgbClr val="000000"/>
+                          </a:solidFill>
+                          <a:latin typeface="Pretendard ExtraBold"/>
+                        </a:rPr>
+                        <a:t>02</a:t>
+                      </a:r>
+                    </a:p>
+                  </a:txBody>
+                  <a:tcPr marL="0" marR="101600" marT="127000" marB="127000" anchor="ctr">
+                    <a:solidFill>
+                      <a:srgbClr val="FFFFFF"/>
+                    </a:solidFill>
+                    <a:lnL w="0">
+                      <a:noFill/>
+                    </a:lnL>
+                    <a:lnR w="0">
+                      <a:noFill/>
+                    </a:lnR>
+                    <a:lnT w="0">
+                      <a:noFill/>
+                    </a:lnT>
+                    <a:lnB w="9525">
+                      <a:solidFill>
+                        <a:srgbClr val="E2E2E2"/>
+                      </a:solidFill>
+                    </a:lnB>
+                  </a:tcPr>
+                </a:tc>
+                <a:tc>
+                  <a:txBody>
+                    <a:bodyPr/>
+                    <a:lstStyle/>
+                    <a:p>
+                      <a:r>
+                        <a:rPr sz="1800" b="1">
+                          <a:solidFill>
+                            <a:srgbClr val="000000"/>
+                          </a:solidFill>
+                          <a:latin typeface="Pretendard"/>
+                        </a:rPr>
+                        <a:t>교재 2.1 도로망은 표 두 개</a:t>
+                      </a:r>
+                    </a:p>
+                  </a:txBody>
+                  <a:tcPr marL="101600" marR="101600" marT="127000" marB="127000" anchor="ctr">
+                    <a:solidFill>
+                      <a:srgbClr val="FFFFFF"/>
+                    </a:solidFill>
+                    <a:lnL w="0">
+                      <a:noFill/>
+                    </a:lnL>
+                    <a:lnR w="0">
+                      <a:noFill/>
+                    </a:lnR>
+                    <a:lnT w="0">
+                      <a:noFill/>
+                    </a:lnT>
+                    <a:lnB w="9525">
+                      <a:solidFill>
+                        <a:srgbClr val="E2E2E2"/>
+                      </a:solidFill>
+                    </a:lnB>
+                  </a:tcPr>
+                </a:tc>
+                <a:tc>
+                  <a:txBody>
+                    <a:bodyPr/>
+                    <a:lstStyle/>
+                    <a:p>
+                      <a:r>
+                        <a:rPr sz="1300" b="0">
+                          <a:solidFill>
+                            <a:srgbClr val="5E5E5E"/>
+                          </a:solidFill>
+                          <a:latin typeface="Pretendard Medium"/>
+                        </a:rPr>
+                        <a:t>2.1 노드 표와 엣지 표</a:t>
+                      </a:r>
+                    </a:p>
+                  </a:txBody>
+                  <a:tcPr marL="101600" marR="101600" marT="127000" marB="127000" anchor="ctr">
+                    <a:solidFill>
+                      <a:srgbClr val="FFFFFF"/>
+                    </a:solidFill>
+                    <a:lnL w="0">
+                      <a:noFill/>
+                    </a:lnL>
+                    <a:lnR w="0">
+                      <a:noFill/>
+                    </a:lnR>
+                    <a:lnT w="0">
+                      <a:noFill/>
+                    </a:lnT>
+                    <a:lnB w="9525">
+                      <a:solidFill>
+                        <a:srgbClr val="E2E2E2"/>
+                      </a:solidFill>
+                    </a:lnB>
+                  </a:tcPr>
+                </a:tc>
+              </a:tr>
+              <a:tr h="736600">
+                <a:tc>
+                  <a:txBody>
+                    <a:bodyPr/>
+                    <a:lstStyle/>
+                    <a:p>
+                      <a:r>
+                        <a:rPr sz="2600" b="0">
+                          <a:solidFill>
+                            <a:srgbClr val="000000"/>
+                          </a:solidFill>
+                          <a:latin typeface="Pretendard ExtraBold"/>
+                        </a:rPr>
+                        <a:t>03</a:t>
+                      </a:r>
+                    </a:p>
+                  </a:txBody>
+                  <a:tcPr marL="0" marR="101600" marT="127000" marB="127000" anchor="ctr">
+                    <a:solidFill>
+                      <a:srgbClr val="FFFFFF"/>
+                    </a:solidFill>
+                    <a:lnL w="0">
+                      <a:noFill/>
+                    </a:lnL>
+                    <a:lnR w="0">
+                      <a:noFill/>
+                    </a:lnR>
+                    <a:lnT w="0">
+                      <a:noFill/>
+                    </a:lnT>
+                    <a:lnB w="9525">
+                      <a:solidFill>
+                        <a:srgbClr val="E2E2E2"/>
+                      </a:solidFill>
+                    </a:lnB>
+                  </a:tcPr>
+                </a:tc>
+                <a:tc>
+                  <a:txBody>
+                    <a:bodyPr/>
+                    <a:lstStyle/>
+                    <a:p>
+                      <a:r>
+                        <a:rPr sz="1800" b="1">
+                          <a:solidFill>
+                            <a:srgbClr val="000000"/>
+                          </a:solidFill>
+                          <a:latin typeface="Pretendard"/>
+                        </a:rPr>
+                        <a:t>교재 2.2 양 끝 노드 찾기</a:t>
+                      </a:r>
+                    </a:p>
+                  </a:txBody>
+                  <a:tcPr marL="101600" marR="101600" marT="127000" marB="127000" anchor="ctr">
+                    <a:solidFill>
+                      <a:srgbClr val="FFFFFF"/>
+                    </a:solidFill>
+                    <a:lnL w="0">
+                      <a:noFill/>
+                    </a:lnL>
+                    <a:lnR w="0">
+                      <a:noFill/>
+                    </a:lnR>
+                    <a:lnT w="0">
+                      <a:noFill/>
+                    </a:lnT>
+                    <a:lnB w="9525">
+                      <a:solidFill>
+                        <a:srgbClr val="E2E2E2"/>
+                      </a:solidFill>
+                    </a:lnB>
+                  </a:tcPr>
+                </a:tc>
+                <a:tc>
+                  <a:txBody>
+                    <a:bodyPr/>
+                    <a:lstStyle/>
+                    <a:p>
+                      <a:r>
+                        <a:rPr sz="1300" b="0">
+                          <a:solidFill>
+                            <a:srgbClr val="5E5E5E"/>
+                          </a:solidFill>
+                          <a:latin typeface="Pretendard Medium"/>
+                        </a:rPr>
+                        <a:t>3.1 edge_id 안에 있는 양 끝 노드  ·  3.2 짐작한 규칙은 그 자리에서 검증  ·  3.3 방향 f와 r</a:t>
+                      </a:r>
+                    </a:p>
+                  </a:txBody>
+                  <a:tcPr marL="101600" marR="101600" marT="127000" marB="127000" anchor="ctr">
+                    <a:solidFill>
+                      <a:srgbClr val="FFFFFF"/>
+                    </a:solidFill>
+                    <a:lnL w="0">
+                      <a:noFill/>
+                    </a:lnL>
+                    <a:lnR w="0">
+                      <a:noFill/>
+                    </a:lnR>
+                    <a:lnT w="0">
+                      <a:noFill/>
+                    </a:lnT>
+                    <a:lnB w="9525">
+                      <a:solidFill>
+                        <a:srgbClr val="E2E2E2"/>
+                      </a:solidFill>
+                    </a:lnB>
+                  </a:tcPr>
+                </a:tc>
+              </a:tr>
+              <a:tr h="736600">
+                <a:tc>
+                  <a:txBody>
+                    <a:bodyPr/>
+                    <a:lstStyle/>
+                    <a:p>
+                      <a:r>
+                        <a:rPr sz="2600" b="0">
+                          <a:solidFill>
+                            <a:srgbClr val="000000"/>
+                          </a:solidFill>
+                          <a:latin typeface="Pretendard ExtraBold"/>
+                        </a:rPr>
+                        <a:t>04</a:t>
+                      </a:r>
+                    </a:p>
+                  </a:txBody>
+                  <a:tcPr marL="0" marR="101600" marT="127000" marB="127000" anchor="ctr">
+                    <a:solidFill>
+                      <a:srgbClr val="FFFFFF"/>
+                    </a:solidFill>
+                    <a:lnL w="0">
+                      <a:noFill/>
+                    </a:lnL>
+                    <a:lnR w="0">
+                      <a:noFill/>
+                    </a:lnR>
+                    <a:lnT w="0">
+                      <a:noFill/>
+                    </a:lnT>
+                    <a:lnB w="9525">
+                      <a:solidFill>
+                        <a:srgbClr val="E2E2E2"/>
+                      </a:solidFill>
+                    </a:lnB>
+                  </a:tcPr>
+                </a:tc>
+                <a:tc>
+                  <a:txBody>
+                    <a:bodyPr/>
+                    <a:lstStyle/>
+                    <a:p>
+                      <a:r>
+                        <a:rPr sz="1800" b="1">
+                          <a:solidFill>
+                            <a:srgbClr val="000000"/>
+                          </a:solidFill>
+                          <a:latin typeface="Pretendard"/>
+                        </a:rPr>
+                        <a:t>교재 2.3 통행수단 필터</a:t>
+                      </a:r>
+                    </a:p>
+                  </a:txBody>
+                  <a:tcPr marL="101600" marR="101600" marT="127000" marB="127000" anchor="ctr">
+                    <a:solidFill>
+                      <a:srgbClr val="FFFFFF"/>
+                    </a:solidFill>
+                    <a:lnL w="0">
+                      <a:noFill/>
+                    </a:lnL>
+                    <a:lnR w="0">
+                      <a:noFill/>
+                    </a:lnR>
+                    <a:lnT w="0">
+                      <a:noFill/>
+                    </a:lnT>
+                    <a:lnB w="9525">
+                      <a:solidFill>
+                        <a:srgbClr val="E2E2E2"/>
+                      </a:solidFill>
+                    </a:lnB>
+                  </a:tcPr>
+                </a:tc>
+                <a:tc>
+                  <a:txBody>
+                    <a:bodyPr/>
+                    <a:lstStyle/>
+                    <a:p>
+                      <a:r>
+                        <a:rPr sz="1300" b="0">
+                          <a:solidFill>
+                            <a:srgbClr val="5E5E5E"/>
+                          </a:solidFill>
+                          <a:latin typeface="Pretendard Medium"/>
+                        </a:rPr>
+                        <a:t>4.1 엣지 절반은 자동차 통행 불가  ·  4.2 필터 적용 전후</a:t>
+                      </a:r>
+                    </a:p>
+                  </a:txBody>
+                  <a:tcPr marL="101600" marR="101600" marT="127000" marB="127000" anchor="ctr">
+                    <a:solidFill>
+                      <a:srgbClr val="FFFFFF"/>
+                    </a:solidFill>
+                    <a:lnL w="0">
+                      <a:noFill/>
+                    </a:lnL>
+                    <a:lnR w="0">
+                      <a:noFill/>
+                    </a:lnR>
+                    <a:lnT w="0">
+                      <a:noFill/>
+                    </a:lnT>
+                    <a:lnB w="9525">
+                      <a:solidFill>
+                        <a:srgbClr val="E2E2E2"/>
+                      </a:solidFill>
+                    </a:lnB>
+                  </a:tcPr>
+                </a:tc>
+              </a:tr>
+              <a:tr h="736600">
+                <a:tc>
+                  <a:txBody>
+                    <a:bodyPr/>
+                    <a:lstStyle/>
+                    <a:p>
+                      <a:r>
+                        <a:rPr sz="2600" b="0">
+                          <a:solidFill>
+                            <a:srgbClr val="000000"/>
+                          </a:solidFill>
+                          <a:latin typeface="Pretendard ExtraBold"/>
+                        </a:rPr>
+                        <a:t>05</a:t>
+                      </a:r>
+                    </a:p>
+                  </a:txBody>
+                  <a:tcPr marL="0" marR="101600" marT="127000" marB="127000" anchor="ctr">
+                    <a:solidFill>
+                      <a:srgbClr val="FFFFFF"/>
+                    </a:solidFill>
+                    <a:lnL w="0">
+                      <a:noFill/>
+                    </a:lnL>
+                    <a:lnR w="0">
+                      <a:noFill/>
+                    </a:lnR>
+                    <a:lnT w="0">
+                      <a:noFill/>
+                    </a:lnT>
+                    <a:lnB w="9525">
+                      <a:solidFill>
+                        <a:srgbClr val="E2E2E2"/>
+                      </a:solidFill>
+                    </a:lnB>
+                  </a:tcPr>
+                </a:tc>
+                <a:tc>
+                  <a:txBody>
+                    <a:bodyPr/>
+                    <a:lstStyle/>
+                    <a:p>
+                      <a:r>
+                        <a:rPr sz="1800" b="1">
+                          <a:solidFill>
+                            <a:srgbClr val="000000"/>
+                          </a:solidFill>
+                          <a:latin typeface="Pretendard"/>
+                        </a:rPr>
+                        <a:t>교재 2.4–2.5 인접 리스트와 스냅</a:t>
+                      </a:r>
+                    </a:p>
+                  </a:txBody>
+                  <a:tcPr marL="101600" marR="101600" marT="127000" marB="127000" anchor="ctr">
+                    <a:solidFill>
+                      <a:srgbClr val="FFFFFF"/>
+                    </a:solidFill>
+                    <a:lnL w="0">
+                      <a:noFill/>
+                    </a:lnL>
+                    <a:lnR w="0">
+                      <a:noFill/>
+                    </a:lnR>
+                    <a:lnT w="0">
+                      <a:noFill/>
+                    </a:lnT>
+                    <a:lnB w="9525">
+                      <a:solidFill>
+                        <a:srgbClr val="E2E2E2"/>
+                      </a:solidFill>
+                    </a:lnB>
+                  </a:tcPr>
+                </a:tc>
+                <a:tc>
+                  <a:txBody>
+                    <a:bodyPr/>
+                    <a:lstStyle/>
+                    <a:p>
+                      <a:r>
+                        <a:rPr sz="1300" b="0">
+                          <a:solidFill>
+                            <a:srgbClr val="5E5E5E"/>
+                          </a:solidFill>
+                          <a:latin typeface="Pretendard Medium"/>
+                        </a:rPr>
+                        <a:t>5.1 비용은 거리가 아니라 소요시간  ·  5.2 좌표의 최근접 노드 탐색</a:t>
+                      </a:r>
+                    </a:p>
+                  </a:txBody>
+                  <a:tcPr marL="101600" marR="101600" marT="127000" marB="127000" anchor="ctr">
+                    <a:solidFill>
+                      <a:srgbClr val="FFFFFF"/>
+                    </a:solidFill>
+                    <a:lnL w="0">
+                      <a:noFill/>
+                    </a:lnL>
+                    <a:lnR w="0">
+                      <a:noFill/>
+                    </a:lnR>
+                    <a:lnT w="0">
+                      <a:noFill/>
+                    </a:lnT>
+                    <a:lnB w="9525">
+                      <a:solidFill>
+                        <a:srgbClr val="E2E2E2"/>
+                      </a:solidFill>
+                    </a:lnB>
+                  </a:tcPr>
+                </a:tc>
+              </a:tr>
+              <a:tr h="736600">
+                <a:tc>
+                  <a:txBody>
+                    <a:bodyPr/>
+                    <a:lstStyle/>
+                    <a:p>
+                      <a:r>
+                        <a:rPr sz="2600" b="0">
+                          <a:solidFill>
+                            <a:srgbClr val="000000"/>
+                          </a:solidFill>
+                          <a:latin typeface="Pretendard ExtraBold"/>
+                        </a:rPr>
+                        <a:t>06</a:t>
+                      </a:r>
+                    </a:p>
+                  </a:txBody>
+                  <a:tcPr marL="0" marR="101600" marT="127000" marB="127000" anchor="ctr">
+                    <a:solidFill>
+                      <a:srgbClr val="FFFFFF"/>
+                    </a:solidFill>
+                    <a:lnL w="0">
+                      <a:noFill/>
+                    </a:lnL>
+                    <a:lnR w="0">
+                      <a:noFill/>
+                    </a:lnR>
+                    <a:lnT w="0">
+                      <a:noFill/>
+                    </a:lnT>
+                    <a:lnB w="9525">
+                      <a:solidFill>
+                        <a:srgbClr val="E2E2E2"/>
+                      </a:solidFill>
+                    </a:lnB>
+                  </a:tcPr>
+                </a:tc>
+                <a:tc>
+                  <a:txBody>
+                    <a:bodyPr/>
+                    <a:lstStyle/>
+                    <a:p>
+                      <a:r>
+                        <a:rPr sz="1800" b="1">
+                          <a:solidFill>
+                            <a:srgbClr val="000000"/>
+                          </a:solidFill>
+                          <a:latin typeface="Pretendard"/>
+                        </a:rPr>
+                        <a:t>교재 2.6 실습과 정리</a:t>
+                      </a:r>
+                    </a:p>
+                  </a:txBody>
+                  <a:tcPr marL="101600" marR="101600" marT="127000" marB="127000" anchor="ctr">
+                    <a:solidFill>
+                      <a:srgbClr val="FFFFFF"/>
+                    </a:solidFill>
+                    <a:lnL w="0">
+                      <a:noFill/>
+                    </a:lnL>
+                    <a:lnR w="0">
+                      <a:noFill/>
+                    </a:lnR>
+                    <a:lnT w="0">
+                      <a:noFill/>
+                    </a:lnT>
+                    <a:lnB w="9525">
+                      <a:solidFill>
+                        <a:srgbClr val="E2E2E2"/>
+                      </a:solidFill>
+                    </a:lnB>
+                  </a:tcPr>
+                </a:tc>
+                <a:tc>
+                  <a:txBody>
+                    <a:bodyPr/>
+                    <a:lstStyle/>
+                    <a:p>
+                      <a:r>
+                        <a:rPr sz="1300" b="0">
+                          <a:solidFill>
+                            <a:srgbClr val="5E5E5E"/>
+                          </a:solidFill>
+                          <a:latin typeface="Pretendard Medium"/>
+                        </a:rPr>
+                        <a:t>6.1 도로망 한 장 요약  ·  6.2 정리와 과제</a:t>
+                      </a:r>
+                    </a:p>
+                  </a:txBody>
+                  <a:tcPr marL="101600" marR="101600" marT="127000" marB="127000" anchor="ctr">
+                    <a:solidFill>
+                      <a:srgbClr val="FFFFFF"/>
+                    </a:solidFill>
+                    <a:lnL w="0">
+                      <a:noFill/>
+                    </a:lnL>
+                    <a:lnR w="0">
+                      <a:noFill/>
+                    </a:lnR>
+                    <a:lnT w="0">
+                      <a:noFill/>
+                    </a:lnT>
+                    <a:lnB w="9525">
+                      <a:solidFill>
+                        <a:srgbClr val="E2E2E2"/>
+                      </a:solidFill>
+                    </a:lnB>
+                  </a:tcPr>
+                </a:tc>
+              </a:tr>
+            </a:tbl>
+          </a:graphicData>
+        </a:graphic>
+      </p:graphicFrame>
+      <p:sp>
+        <p:nvSpPr>
+          <p:cNvPr id="25" name="Slide Number Placeholder 0"/>
+          <p:cNvSpPr>
+            <a:spLocks noGrp="1"/>
+          </p:cNvSpPr>
+          <p:nvPr>
+            <p:ph type="sldNum" sz="quarter" idx="4294967295"/>
+          </p:nvPr>
+        </p:nvSpPr>
+        <p:spPr>
+          <a:xfrm>
+            <a:off x="10591495" y="6355080"/>
+            <a:ext cx="914400" cy="274320"/>
+          </a:xfrm>
+          <a:prstGeom prst="rect">
+            <a:avLst/>
+          </a:prstGeom>
+          <a:extLst>
+            <a:ext uri="{C572A759-6A51-4108-AA02-DFA0A04FC94B}">
+              <ma14:wrappingTextBoxFlag xmlns:ma14="http://schemas.microsoft.com/office/mac/drawingml/2011/main" val="0"/>
+            </a:ext>
+          </a:extLst>
+        </p:spPr>
+        <p:txBody>
+          <a:bodyPr/>
+          <a:lstStyle>
+            <a:lvl1pPr>
+              <a:defRPr sz="1000">
+                <a:solidFill>
+                  <a:srgbClr val="AFAFAF"/>
+                </a:solidFill>
+                <a:latin typeface="Pretendard Medium"/>
+                <a:ea typeface="Pretendard Medium"/>
+                <a:cs typeface="Pretendard Medium"/>
+              </a:defRPr>
+            </a:lvl1pPr>
+          </a:lstStyle>
+          <a:p>
+            <a:pPr algn="r"/>
+            <a:fld id="{F7021451-1387-4CA6-816F-3879F97B5CBC}" type="slidenum">
+              <a:rPr b="0" lang="en-US"/>
+              <a:t>1007</a:t>
+            </a:fld>
+            <a:endParaRPr lang="en-US"/>
+          </a:p>
+        </p:txBody>
+      </p:sp>
+    </p:spTree>
+  </p:cSld>
+  <p:clrMapOvr>
+    <a:masterClrMapping/>
+  </p:clrMapOvr>
+</p:sld>
+</file>
+
+<file path=ppt/slides/slide20.xml><?xml version="1.0" encoding="utf-8"?>
+<p:sld xmlns:a="http://schemas.openxmlformats.org/drawingml/2006/main" xmlns:p="http://schemas.openxmlformats.org/presentationml/2006/main" xmlns:r="http://schemas.openxmlformats.org/officeDocument/2006/relationships">
+  <p:cSld>
+    <p:spTree>
+      <p:nvGrpSpPr>
+        <p:cNvPr id="1" name=""/>
+        <p:cNvGrpSpPr/>
+        <p:nvPr/>
+      </p:nvGrpSpPr>
+      <p:grpSpPr/>
+      <p:sp>
+        <p:nvSpPr>
+          <p:cNvPr id="2" name="Title 1"/>
+          <p:cNvSpPr>
+            <a:spLocks noGrp="1"/>
+          </p:cNvSpPr>
+          <p:nvPr>
+            <p:ph type="title" idx="100"/>
+          </p:nvPr>
+        </p:nvSpPr>
+        <p:spPr/>
+        <p:txBody>
+          <a:bodyPr/>
+          <a:lstStyle/>
+          <a:p>
+            <a:r>
+              <a:t>6.1 도로망 한 장 요약</a:t>
+            </a:r>
+          </a:p>
+        </p:txBody>
+      </p:sp>
+      <p:sp>
+        <p:nvSpPr>
+          <p:cNvPr id="3" name="Text Placeholder 2"/>
+          <p:cNvSpPr>
+            <a:spLocks noGrp="1"/>
+          </p:cNvSpPr>
+          <p:nvPr>
+            <p:ph type="body" idx="101"/>
+          </p:nvPr>
+        </p:nvSpPr>
+        <p:spPr/>
+        <p:txBody>
+          <a:bodyPr/>
+          <a:lstStyle/>
+          <a:p>
+            <a:r>
+              <a:t>6. 교재 2.6 실습과 정리</a:t>
+            </a:r>
+          </a:p>
+        </p:txBody>
+      </p:sp>
+      <p:sp>
+        <p:nvSpPr>
+          <p:cNvPr id="4" name="Text Placeholder 3"/>
+          <p:cNvSpPr>
+            <a:spLocks noGrp="1"/>
+          </p:cNvSpPr>
+          <p:nvPr>
+            <p:ph type="body" idx="102"/>
+          </p:nvPr>
+        </p:nvSpPr>
+        <p:spPr/>
+        <p:txBody>
+          <a:bodyPr/>
+          <a:lstStyle/>
+          <a:p>
+            <a:pPr/>
+            <a:r>
+              <a:t>산출 순서: 필터 → 인접 리스트 → 대조 → 요약</a:t>
+            </a:r>
+          </a:p>
+          <a:p>
+            <a:pPr/>
+            <a:r>
+              <a:t>총 연장 불일치 시 DRIVE 집합 재점검</a:t>
+            </a:r>
+          </a:p>
+          <a:p>
+            <a:pPr/>
+            <a:r>
+              <a:t>숫자마다 해석 한 문장 첨부</a:t>
+            </a:r>
+          </a:p>
+        </p:txBody>
+      </p:sp>
+      <p:sp>
+        <p:nvSpPr>
+          <p:cNvPr id="5" name="Text Placeholder 4"/>
+          <p:cNvSpPr>
+            <a:spLocks noGrp="1"/>
+          </p:cNvSpPr>
+          <p:nvPr>
+            <p:ph type="body" idx="103"/>
+          </p:nvPr>
+        </p:nvSpPr>
+        <p:spPr/>
+        <p:txBody>
+          <a:bodyPr/>
+          <a:lstStyle/>
+          <a:p>
+            <a:r>
+              <a:t>표 6. 하남시 자동차 도로망 요약 지표</a:t>
             </a:r>
           </a:p>
         </p:txBody>
@@ -7733,7 +9154,7 @@
 </p:sld>
 </file>
 
-<file path=ppt/slides/slide2.xml><?xml version="1.0" encoding="utf-8"?>
+<file path=ppt/slides/slide21.xml><?xml version="1.0" encoding="utf-8"?>
 <p:sld xmlns:a="http://schemas.openxmlformats.org/drawingml/2006/main" xmlns:p="http://schemas.openxmlformats.org/presentationml/2006/main" xmlns:r="http://schemas.openxmlformats.org/officeDocument/2006/relationships">
   <p:cSld>
     <p:spTree>
@@ -7759,7 +9180,7 @@
           <a:lstStyle/>
           <a:p>
             <a:r>
-              <a:t>강의 목차</a:t>
+              <a:t>6.2 정리와 과제</a:t>
             </a:r>
           </a:p>
         </p:txBody>
@@ -7780,698 +9201,63 @@
           <a:lstStyle/>
           <a:p>
             <a:r>
-              <a:t>교재 2장</a:t>
-            </a:r>
-          </a:p>
-        </p:txBody>
-      </p:sp>
-      <p:graphicFrame>
-        <p:nvGraphicFramePr>
-          <p:cNvPr id="5" name="Table Placeholder 4"/>
-          <p:cNvGraphicFramePr>
-            <a:graphicFrameLocks noGrp="1"/>
-          </p:cNvGraphicFramePr>
-          <p:nvPr>
-            <p:ph type="tbl" idx="103"/>
-          </p:nvPr>
-        </p:nvGraphicFramePr>
-        <p:xfrm>
-          <a:off x="685800" y="1828800"/>
-          <a:ext cx="10820093" cy="4419600"/>
-        </p:xfrm>
-        <a:graphic>
-          <a:graphicData uri="http://schemas.openxmlformats.org/drawingml/2006/table">
-            <a:tbl>
-              <a:tblPr firstRow="0" bandRow="0" firstCol="0" lastRow="0" lastCol="0" bandCol="0"/>
-              <a:tblGrid>
-                <a:gridCol w="914631"/>
-                <a:gridCol w="2560969"/>
-                <a:gridCol w="7344493"/>
-              </a:tblGrid>
-              <a:tr h="736600">
-                <a:tc>
-                  <a:txBody>
-                    <a:bodyPr/>
-                    <a:lstStyle/>
-                    <a:p>
-                      <a:r>
-                        <a:rPr sz="2600" b="0">
-                          <a:solidFill>
-                            <a:srgbClr val="000000"/>
-                          </a:solidFill>
-                          <a:latin typeface="Pretendard ExtraBold"/>
-                        </a:rPr>
-                        <a:t>01</a:t>
-                      </a:r>
-                    </a:p>
-                  </a:txBody>
-                  <a:tcPr marL="0" marR="101600" marT="127000" marB="127000" anchor="ctr">
-                    <a:solidFill>
-                      <a:srgbClr val="FFFFFF"/>
-                    </a:solidFill>
-                    <a:lnL w="0">
-                      <a:noFill/>
-                    </a:lnL>
-                    <a:lnR w="0">
-                      <a:noFill/>
-                    </a:lnR>
-                    <a:lnT w="0">
-                      <a:noFill/>
-                    </a:lnT>
-                    <a:lnB w="9525">
-                      <a:solidFill>
-                        <a:srgbClr val="E2E2E2"/>
-                      </a:solidFill>
-                    </a:lnB>
-                  </a:tcPr>
-                </a:tc>
-                <a:tc>
-                  <a:txBody>
-                    <a:bodyPr/>
-                    <a:lstStyle/>
-                    <a:p>
-                      <a:r>
-                        <a:rPr sz="1800" b="1">
-                          <a:solidFill>
-                            <a:srgbClr val="000000"/>
-                          </a:solidFill>
-                          <a:latin typeface="Pretendard"/>
-                        </a:rPr>
-                        <a:t>도입과 학습 목표</a:t>
-                      </a:r>
-                    </a:p>
-                  </a:txBody>
-                  <a:tcPr marL="101600" marR="101600" marT="127000" marB="127000" anchor="ctr">
-                    <a:solidFill>
-                      <a:srgbClr val="FFFFFF"/>
-                    </a:solidFill>
-                    <a:lnL w="0">
-                      <a:noFill/>
-                    </a:lnL>
-                    <a:lnR w="0">
-                      <a:noFill/>
-                    </a:lnR>
-                    <a:lnT w="0">
-                      <a:noFill/>
-                    </a:lnT>
-                    <a:lnB w="9525">
-                      <a:solidFill>
-                        <a:srgbClr val="E2E2E2"/>
-                      </a:solidFill>
-                    </a:lnB>
-                  </a:tcPr>
-                </a:tc>
-                <a:tc>
-                  <a:txBody>
-                    <a:bodyPr/>
-                    <a:lstStyle/>
-                    <a:p>
-                      <a:r>
-                        <a:rPr sz="1300" b="0">
-                          <a:solidFill>
-                            <a:srgbClr val="5E5E5E"/>
-                          </a:solidFill>
-                          <a:latin typeface="Pretendard Medium"/>
-                        </a:rPr>
-                        <a:t>1.1 소요시간 계산의 입력 자료  ·  1.2 학습 목표</a:t>
-                      </a:r>
-                    </a:p>
-                  </a:txBody>
-                  <a:tcPr marL="101600" marR="101600" marT="127000" marB="127000" anchor="ctr">
-                    <a:solidFill>
-                      <a:srgbClr val="FFFFFF"/>
-                    </a:solidFill>
-                    <a:lnL w="0">
-                      <a:noFill/>
-                    </a:lnL>
-                    <a:lnR w="0">
-                      <a:noFill/>
-                    </a:lnR>
-                    <a:lnT w="0">
-                      <a:noFill/>
-                    </a:lnT>
-                    <a:lnB w="9525">
-                      <a:solidFill>
-                        <a:srgbClr val="E2E2E2"/>
-                      </a:solidFill>
-                    </a:lnB>
-                  </a:tcPr>
-                </a:tc>
-              </a:tr>
-              <a:tr h="736600">
-                <a:tc>
-                  <a:txBody>
-                    <a:bodyPr/>
-                    <a:lstStyle/>
-                    <a:p>
-                      <a:r>
-                        <a:rPr sz="2600" b="0">
-                          <a:solidFill>
-                            <a:srgbClr val="000000"/>
-                          </a:solidFill>
-                          <a:latin typeface="Pretendard ExtraBold"/>
-                        </a:rPr>
-                        <a:t>02</a:t>
-                      </a:r>
-                    </a:p>
-                  </a:txBody>
-                  <a:tcPr marL="0" marR="101600" marT="127000" marB="127000" anchor="ctr">
-                    <a:solidFill>
-                      <a:srgbClr val="FFFFFF"/>
-                    </a:solidFill>
-                    <a:lnL w="0">
-                      <a:noFill/>
-                    </a:lnL>
-                    <a:lnR w="0">
-                      <a:noFill/>
-                    </a:lnR>
-                    <a:lnT w="0">
-                      <a:noFill/>
-                    </a:lnT>
-                    <a:lnB w="9525">
-                      <a:solidFill>
-                        <a:srgbClr val="E2E2E2"/>
-                      </a:solidFill>
-                    </a:lnB>
-                  </a:tcPr>
-                </a:tc>
-                <a:tc>
-                  <a:txBody>
-                    <a:bodyPr/>
-                    <a:lstStyle/>
-                    <a:p>
-                      <a:r>
-                        <a:rPr sz="1800" b="1">
-                          <a:solidFill>
-                            <a:srgbClr val="000000"/>
-                          </a:solidFill>
-                          <a:latin typeface="Pretendard"/>
-                        </a:rPr>
-                        <a:t>교재 2.1 도로망은 표 두 개</a:t>
-                      </a:r>
-                    </a:p>
-                  </a:txBody>
-                  <a:tcPr marL="101600" marR="101600" marT="127000" marB="127000" anchor="ctr">
-                    <a:solidFill>
-                      <a:srgbClr val="FFFFFF"/>
-                    </a:solidFill>
-                    <a:lnL w="0">
-                      <a:noFill/>
-                    </a:lnL>
-                    <a:lnR w="0">
-                      <a:noFill/>
-                    </a:lnR>
-                    <a:lnT w="0">
-                      <a:noFill/>
-                    </a:lnT>
-                    <a:lnB w="9525">
-                      <a:solidFill>
-                        <a:srgbClr val="E2E2E2"/>
-                      </a:solidFill>
-                    </a:lnB>
-                  </a:tcPr>
-                </a:tc>
-                <a:tc>
-                  <a:txBody>
-                    <a:bodyPr/>
-                    <a:lstStyle/>
-                    <a:p>
-                      <a:r>
-                        <a:rPr sz="1300" b="0">
-                          <a:solidFill>
-                            <a:srgbClr val="5E5E5E"/>
-                          </a:solidFill>
-                          <a:latin typeface="Pretendard Medium"/>
-                        </a:rPr>
-                        <a:t>2.1 노드 표와 엣지 표</a:t>
-                      </a:r>
-                    </a:p>
-                  </a:txBody>
-                  <a:tcPr marL="101600" marR="101600" marT="127000" marB="127000" anchor="ctr">
-                    <a:solidFill>
-                      <a:srgbClr val="FFFFFF"/>
-                    </a:solidFill>
-                    <a:lnL w="0">
-                      <a:noFill/>
-                    </a:lnL>
-                    <a:lnR w="0">
-                      <a:noFill/>
-                    </a:lnR>
-                    <a:lnT w="0">
-                      <a:noFill/>
-                    </a:lnT>
-                    <a:lnB w="9525">
-                      <a:solidFill>
-                        <a:srgbClr val="E2E2E2"/>
-                      </a:solidFill>
-                    </a:lnB>
-                  </a:tcPr>
-                </a:tc>
-              </a:tr>
-              <a:tr h="736600">
-                <a:tc>
-                  <a:txBody>
-                    <a:bodyPr/>
-                    <a:lstStyle/>
-                    <a:p>
-                      <a:r>
-                        <a:rPr sz="2600" b="0">
-                          <a:solidFill>
-                            <a:srgbClr val="000000"/>
-                          </a:solidFill>
-                          <a:latin typeface="Pretendard ExtraBold"/>
-                        </a:rPr>
-                        <a:t>03</a:t>
-                      </a:r>
-                    </a:p>
-                  </a:txBody>
-                  <a:tcPr marL="0" marR="101600" marT="127000" marB="127000" anchor="ctr">
-                    <a:solidFill>
-                      <a:srgbClr val="FFFFFF"/>
-                    </a:solidFill>
-                    <a:lnL w="0">
-                      <a:noFill/>
-                    </a:lnL>
-                    <a:lnR w="0">
-                      <a:noFill/>
-                    </a:lnR>
-                    <a:lnT w="0">
-                      <a:noFill/>
-                    </a:lnT>
-                    <a:lnB w="9525">
-                      <a:solidFill>
-                        <a:srgbClr val="E2E2E2"/>
-                      </a:solidFill>
-                    </a:lnB>
-                  </a:tcPr>
-                </a:tc>
-                <a:tc>
-                  <a:txBody>
-                    <a:bodyPr/>
-                    <a:lstStyle/>
-                    <a:p>
-                      <a:r>
-                        <a:rPr sz="1800" b="1">
-                          <a:solidFill>
-                            <a:srgbClr val="000000"/>
-                          </a:solidFill>
-                          <a:latin typeface="Pretendard"/>
-                        </a:rPr>
-                        <a:t>교재 2.2 양 끝 노드 찾기</a:t>
-                      </a:r>
-                    </a:p>
-                  </a:txBody>
-                  <a:tcPr marL="101600" marR="101600" marT="127000" marB="127000" anchor="ctr">
-                    <a:solidFill>
-                      <a:srgbClr val="FFFFFF"/>
-                    </a:solidFill>
-                    <a:lnL w="0">
-                      <a:noFill/>
-                    </a:lnL>
-                    <a:lnR w="0">
-                      <a:noFill/>
-                    </a:lnR>
-                    <a:lnT w="0">
-                      <a:noFill/>
-                    </a:lnT>
-                    <a:lnB w="9525">
-                      <a:solidFill>
-                        <a:srgbClr val="E2E2E2"/>
-                      </a:solidFill>
-                    </a:lnB>
-                  </a:tcPr>
-                </a:tc>
-                <a:tc>
-                  <a:txBody>
-                    <a:bodyPr/>
-                    <a:lstStyle/>
-                    <a:p>
-                      <a:r>
-                        <a:rPr sz="1300" b="0">
-                          <a:solidFill>
-                            <a:srgbClr val="5E5E5E"/>
-                          </a:solidFill>
-                          <a:latin typeface="Pretendard Medium"/>
-                        </a:rPr>
-                        <a:t>3.1 edge_id 안에 있는 양 끝 노드  ·  3.2 짐작한 규칙은 그 자리에서 검증  ·  3.3 방향 f와 r</a:t>
-                      </a:r>
-                    </a:p>
-                  </a:txBody>
-                  <a:tcPr marL="101600" marR="101600" marT="127000" marB="127000" anchor="ctr">
-                    <a:solidFill>
-                      <a:srgbClr val="FFFFFF"/>
-                    </a:solidFill>
-                    <a:lnL w="0">
-                      <a:noFill/>
-                    </a:lnL>
-                    <a:lnR w="0">
-                      <a:noFill/>
-                    </a:lnR>
-                    <a:lnT w="0">
-                      <a:noFill/>
-                    </a:lnT>
-                    <a:lnB w="9525">
-                      <a:solidFill>
-                        <a:srgbClr val="E2E2E2"/>
-                      </a:solidFill>
-                    </a:lnB>
-                  </a:tcPr>
-                </a:tc>
-              </a:tr>
-              <a:tr h="736600">
-                <a:tc>
-                  <a:txBody>
-                    <a:bodyPr/>
-                    <a:lstStyle/>
-                    <a:p>
-                      <a:r>
-                        <a:rPr sz="2600" b="0">
-                          <a:solidFill>
-                            <a:srgbClr val="000000"/>
-                          </a:solidFill>
-                          <a:latin typeface="Pretendard ExtraBold"/>
-                        </a:rPr>
-                        <a:t>04</a:t>
-                      </a:r>
-                    </a:p>
-                  </a:txBody>
-                  <a:tcPr marL="0" marR="101600" marT="127000" marB="127000" anchor="ctr">
-                    <a:solidFill>
-                      <a:srgbClr val="FFFFFF"/>
-                    </a:solidFill>
-                    <a:lnL w="0">
-                      <a:noFill/>
-                    </a:lnL>
-                    <a:lnR w="0">
-                      <a:noFill/>
-                    </a:lnR>
-                    <a:lnT w="0">
-                      <a:noFill/>
-                    </a:lnT>
-                    <a:lnB w="9525">
-                      <a:solidFill>
-                        <a:srgbClr val="E2E2E2"/>
-                      </a:solidFill>
-                    </a:lnB>
-                  </a:tcPr>
-                </a:tc>
-                <a:tc>
-                  <a:txBody>
-                    <a:bodyPr/>
-                    <a:lstStyle/>
-                    <a:p>
-                      <a:r>
-                        <a:rPr sz="1800" b="1">
-                          <a:solidFill>
-                            <a:srgbClr val="000000"/>
-                          </a:solidFill>
-                          <a:latin typeface="Pretendard"/>
-                        </a:rPr>
-                        <a:t>교재 2.3 통행수단 필터</a:t>
-                      </a:r>
-                    </a:p>
-                  </a:txBody>
-                  <a:tcPr marL="101600" marR="101600" marT="127000" marB="127000" anchor="ctr">
-                    <a:solidFill>
-                      <a:srgbClr val="FFFFFF"/>
-                    </a:solidFill>
-                    <a:lnL w="0">
-                      <a:noFill/>
-                    </a:lnL>
-                    <a:lnR w="0">
-                      <a:noFill/>
-                    </a:lnR>
-                    <a:lnT w="0">
-                      <a:noFill/>
-                    </a:lnT>
-                    <a:lnB w="9525">
-                      <a:solidFill>
-                        <a:srgbClr val="E2E2E2"/>
-                      </a:solidFill>
-                    </a:lnB>
-                  </a:tcPr>
-                </a:tc>
-                <a:tc>
-                  <a:txBody>
-                    <a:bodyPr/>
-                    <a:lstStyle/>
-                    <a:p>
-                      <a:r>
-                        <a:rPr sz="1300" b="0">
-                          <a:solidFill>
-                            <a:srgbClr val="5E5E5E"/>
-                          </a:solidFill>
-                          <a:latin typeface="Pretendard Medium"/>
-                        </a:rPr>
-                        <a:t>4.1 엣지 절반은 자동차 통행 불가  ·  4.2 필터 적용 전후</a:t>
-                      </a:r>
-                    </a:p>
-                  </a:txBody>
-                  <a:tcPr marL="101600" marR="101600" marT="127000" marB="127000" anchor="ctr">
-                    <a:solidFill>
-                      <a:srgbClr val="FFFFFF"/>
-                    </a:solidFill>
-                    <a:lnL w="0">
-                      <a:noFill/>
-                    </a:lnL>
-                    <a:lnR w="0">
-                      <a:noFill/>
-                    </a:lnR>
-                    <a:lnT w="0">
-                      <a:noFill/>
-                    </a:lnT>
-                    <a:lnB w="9525">
-                      <a:solidFill>
-                        <a:srgbClr val="E2E2E2"/>
-                      </a:solidFill>
-                    </a:lnB>
-                  </a:tcPr>
-                </a:tc>
-              </a:tr>
-              <a:tr h="736600">
-                <a:tc>
-                  <a:txBody>
-                    <a:bodyPr/>
-                    <a:lstStyle/>
-                    <a:p>
-                      <a:r>
-                        <a:rPr sz="2600" b="0">
-                          <a:solidFill>
-                            <a:srgbClr val="000000"/>
-                          </a:solidFill>
-                          <a:latin typeface="Pretendard ExtraBold"/>
-                        </a:rPr>
-                        <a:t>05</a:t>
-                      </a:r>
-                    </a:p>
-                  </a:txBody>
-                  <a:tcPr marL="0" marR="101600" marT="127000" marB="127000" anchor="ctr">
-                    <a:solidFill>
-                      <a:srgbClr val="FFFFFF"/>
-                    </a:solidFill>
-                    <a:lnL w="0">
-                      <a:noFill/>
-                    </a:lnL>
-                    <a:lnR w="0">
-                      <a:noFill/>
-                    </a:lnR>
-                    <a:lnT w="0">
-                      <a:noFill/>
-                    </a:lnT>
-                    <a:lnB w="9525">
-                      <a:solidFill>
-                        <a:srgbClr val="E2E2E2"/>
-                      </a:solidFill>
-                    </a:lnB>
-                  </a:tcPr>
-                </a:tc>
-                <a:tc>
-                  <a:txBody>
-                    <a:bodyPr/>
-                    <a:lstStyle/>
-                    <a:p>
-                      <a:r>
-                        <a:rPr sz="1800" b="1">
-                          <a:solidFill>
-                            <a:srgbClr val="000000"/>
-                          </a:solidFill>
-                          <a:latin typeface="Pretendard"/>
-                        </a:rPr>
-                        <a:t>교재 2.4–2.5 인접 리스트와 스냅</a:t>
-                      </a:r>
-                    </a:p>
-                  </a:txBody>
-                  <a:tcPr marL="101600" marR="101600" marT="127000" marB="127000" anchor="ctr">
-                    <a:solidFill>
-                      <a:srgbClr val="FFFFFF"/>
-                    </a:solidFill>
-                    <a:lnL w="0">
-                      <a:noFill/>
-                    </a:lnL>
-                    <a:lnR w="0">
-                      <a:noFill/>
-                    </a:lnR>
-                    <a:lnT w="0">
-                      <a:noFill/>
-                    </a:lnT>
-                    <a:lnB w="9525">
-                      <a:solidFill>
-                        <a:srgbClr val="E2E2E2"/>
-                      </a:solidFill>
-                    </a:lnB>
-                  </a:tcPr>
-                </a:tc>
-                <a:tc>
-                  <a:txBody>
-                    <a:bodyPr/>
-                    <a:lstStyle/>
-                    <a:p>
-                      <a:r>
-                        <a:rPr sz="1300" b="0">
-                          <a:solidFill>
-                            <a:srgbClr val="5E5E5E"/>
-                          </a:solidFill>
-                          <a:latin typeface="Pretendard Medium"/>
-                        </a:rPr>
-                        <a:t>5.1 비용은 거리가 아니라 소요시간  ·  5.2 좌표의 최근접 노드 탐색</a:t>
-                      </a:r>
-                    </a:p>
-                  </a:txBody>
-                  <a:tcPr marL="101600" marR="101600" marT="127000" marB="127000" anchor="ctr">
-                    <a:solidFill>
-                      <a:srgbClr val="FFFFFF"/>
-                    </a:solidFill>
-                    <a:lnL w="0">
-                      <a:noFill/>
-                    </a:lnL>
-                    <a:lnR w="0">
-                      <a:noFill/>
-                    </a:lnR>
-                    <a:lnT w="0">
-                      <a:noFill/>
-                    </a:lnT>
-                    <a:lnB w="9525">
-                      <a:solidFill>
-                        <a:srgbClr val="E2E2E2"/>
-                      </a:solidFill>
-                    </a:lnB>
-                  </a:tcPr>
-                </a:tc>
-              </a:tr>
-              <a:tr h="736600">
-                <a:tc>
-                  <a:txBody>
-                    <a:bodyPr/>
-                    <a:lstStyle/>
-                    <a:p>
-                      <a:r>
-                        <a:rPr sz="2600" b="0">
-                          <a:solidFill>
-                            <a:srgbClr val="000000"/>
-                          </a:solidFill>
-                          <a:latin typeface="Pretendard ExtraBold"/>
-                        </a:rPr>
-                        <a:t>06</a:t>
-                      </a:r>
-                    </a:p>
-                  </a:txBody>
-                  <a:tcPr marL="0" marR="101600" marT="127000" marB="127000" anchor="ctr">
-                    <a:solidFill>
-                      <a:srgbClr val="FFFFFF"/>
-                    </a:solidFill>
-                    <a:lnL w="0">
-                      <a:noFill/>
-                    </a:lnL>
-                    <a:lnR w="0">
-                      <a:noFill/>
-                    </a:lnR>
-                    <a:lnT w="0">
-                      <a:noFill/>
-                    </a:lnT>
-                    <a:lnB w="9525">
-                      <a:solidFill>
-                        <a:srgbClr val="E2E2E2"/>
-                      </a:solidFill>
-                    </a:lnB>
-                  </a:tcPr>
-                </a:tc>
-                <a:tc>
-                  <a:txBody>
-                    <a:bodyPr/>
-                    <a:lstStyle/>
-                    <a:p>
-                      <a:r>
-                        <a:rPr sz="1800" b="1">
-                          <a:solidFill>
-                            <a:srgbClr val="000000"/>
-                          </a:solidFill>
-                          <a:latin typeface="Pretendard"/>
-                        </a:rPr>
-                        <a:t>교재 2.6 실습과 정리</a:t>
-                      </a:r>
-                    </a:p>
-                  </a:txBody>
-                  <a:tcPr marL="101600" marR="101600" marT="127000" marB="127000" anchor="ctr">
-                    <a:solidFill>
-                      <a:srgbClr val="FFFFFF"/>
-                    </a:solidFill>
-                    <a:lnL w="0">
-                      <a:noFill/>
-                    </a:lnL>
-                    <a:lnR w="0">
-                      <a:noFill/>
-                    </a:lnR>
-                    <a:lnT w="0">
-                      <a:noFill/>
-                    </a:lnT>
-                    <a:lnB w="9525">
-                      <a:solidFill>
-                        <a:srgbClr val="E2E2E2"/>
-                      </a:solidFill>
-                    </a:lnB>
-                  </a:tcPr>
-                </a:tc>
-                <a:tc>
-                  <a:txBody>
-                    <a:bodyPr/>
-                    <a:lstStyle/>
-                    <a:p>
-                      <a:r>
-                        <a:rPr sz="1300" b="0">
-                          <a:solidFill>
-                            <a:srgbClr val="5E5E5E"/>
-                          </a:solidFill>
-                          <a:latin typeface="Pretendard Medium"/>
-                        </a:rPr>
-                        <a:t>6.1 도로망 한 장 요약  ·  6.2 정리와 과제</a:t>
-                      </a:r>
-                    </a:p>
-                  </a:txBody>
-                  <a:tcPr marL="101600" marR="101600" marT="127000" marB="127000" anchor="ctr">
-                    <a:solidFill>
-                      <a:srgbClr val="FFFFFF"/>
-                    </a:solidFill>
-                    <a:lnL w="0">
-                      <a:noFill/>
-                    </a:lnL>
-                    <a:lnR w="0">
-                      <a:noFill/>
-                    </a:lnR>
-                    <a:lnT w="0">
-                      <a:noFill/>
-                    </a:lnT>
-                    <a:lnB w="9525">
-                      <a:solidFill>
-                        <a:srgbClr val="E2E2E2"/>
-                      </a:solidFill>
-                    </a:lnB>
-                  </a:tcPr>
-                </a:tc>
-              </a:tr>
-            </a:tbl>
-          </a:graphicData>
-        </a:graphic>
-      </p:graphicFrame>
+              <a:t>6. 교재 2.6 실습과 정리</a:t>
+            </a:r>
+          </a:p>
+        </p:txBody>
+      </p:sp>
+      <p:sp>
+        <p:nvSpPr>
+          <p:cNvPr id="4" name="Text Placeholder 3"/>
+          <p:cNvSpPr>
+            <a:spLocks noGrp="1"/>
+          </p:cNvSpPr>
+          <p:nvPr>
+            <p:ph type="body" idx="102"/>
+          </p:nvPr>
+        </p:nvSpPr>
+        <p:spPr/>
+        <p:txBody>
+          <a:bodyPr/>
+          <a:lstStyle/>
+          <a:p>
+            <a:pPr/>
+            <a:r>
+              <a:t>엣지의 양 끝은 컬럼이 아니라 edge_id 안</a:t>
+            </a:r>
+          </a:p>
+          <a:p>
+            <a:pPr/>
+            <a:r>
+              <a:t>엣지 절반 이상이 보행로 — 필터 필수</a:t>
+            </a:r>
+          </a:p>
+          <a:p>
+            <a:pPr/>
+            <a:r>
+              <a:t>인접 리스트의 비용은 소요시간 (length / speed)</a:t>
+            </a:r>
+          </a:p>
+          <a:p>
+            <a:pPr/>
+            <a:r>
+              <a:t>HW1 (4주차 09-22 마감) — 오늘 내용과 다음 주 다익스트라</a:t>
+            </a:r>
+          </a:p>
+          <a:p>
+            <a:pPr lvl="1"/>
+            <a:r>
+              <a:t>A부는 오늘 만든 인접 리스트를 load_road_graph와 대조</a:t>
+            </a:r>
+          </a:p>
+          <a:p>
+            <a:pPr lvl="1"/>
+            <a:r>
+              <a:t>채점 대상은 코드가 아니라 대조 결과와 해석 문장</a:t>
+            </a:r>
+          </a:p>
+        </p:txBody>
+      </p:sp>
       <p:sp>
         <p:nvSpPr>
           <p:cNvPr id="25" name="Slide Number Placeholder 0"/>
@@ -8514,7 +9300,7 @@
             <a:pPr algn="r"/>
             <a:fld id="{F7021451-1387-4CA6-816F-3879F97B5CBC}" type="slidenum">
               <a:rPr b="0" lang="en-US"/>
-              <a:t>1007</a:t>
+              <a:t>1004</a:t>
             </a:fld>
             <a:endParaRPr lang="en-US"/>
           </a:p>
@@ -8528,167 +9314,7 @@
 </p:sld>
 </file>
 
-<file path=ppt/slides/slide20.xml><?xml version="1.0" encoding="utf-8"?>
-<p:sld xmlns:a="http://schemas.openxmlformats.org/drawingml/2006/main" xmlns:p="http://schemas.openxmlformats.org/presentationml/2006/main" xmlns:r="http://schemas.openxmlformats.org/officeDocument/2006/relationships">
-  <p:cSld>
-    <p:spTree>
-      <p:nvGrpSpPr>
-        <p:cNvPr id="1" name=""/>
-        <p:cNvGrpSpPr/>
-        <p:nvPr/>
-      </p:nvGrpSpPr>
-      <p:grpSpPr/>
-      <p:sp>
-        <p:nvSpPr>
-          <p:cNvPr id="2" name="Title 1"/>
-          <p:cNvSpPr>
-            <a:spLocks noGrp="1"/>
-          </p:cNvSpPr>
-          <p:nvPr>
-            <p:ph type="title" idx="100"/>
-          </p:nvPr>
-        </p:nvSpPr>
-        <p:spPr/>
-        <p:txBody>
-          <a:bodyPr/>
-          <a:lstStyle/>
-          <a:p>
-            <a:r>
-              <a:t>6.2 정리와 과제</a:t>
-            </a:r>
-          </a:p>
-        </p:txBody>
-      </p:sp>
-      <p:sp>
-        <p:nvSpPr>
-          <p:cNvPr id="3" name="Text Placeholder 2"/>
-          <p:cNvSpPr>
-            <a:spLocks noGrp="1"/>
-          </p:cNvSpPr>
-          <p:nvPr>
-            <p:ph type="body" idx="101"/>
-          </p:nvPr>
-        </p:nvSpPr>
-        <p:spPr/>
-        <p:txBody>
-          <a:bodyPr/>
-          <a:lstStyle/>
-          <a:p>
-            <a:r>
-              <a:t>6. 교재 2.6 실습과 정리</a:t>
-            </a:r>
-          </a:p>
-        </p:txBody>
-      </p:sp>
-      <p:sp>
-        <p:nvSpPr>
-          <p:cNvPr id="4" name="Text Placeholder 3"/>
-          <p:cNvSpPr>
-            <a:spLocks noGrp="1"/>
-          </p:cNvSpPr>
-          <p:nvPr>
-            <p:ph type="body" idx="102"/>
-          </p:nvPr>
-        </p:nvSpPr>
-        <p:spPr/>
-        <p:txBody>
-          <a:bodyPr/>
-          <a:lstStyle/>
-          <a:p>
-            <a:pPr/>
-            <a:r>
-              <a:t>엣지의 양 끝은 컬럼이 아니라 edge_id 안</a:t>
-            </a:r>
-          </a:p>
-          <a:p>
-            <a:pPr/>
-            <a:r>
-              <a:t>엣지 절반 이상이 보행로 — 필터 필수</a:t>
-            </a:r>
-          </a:p>
-          <a:p>
-            <a:pPr/>
-            <a:r>
-              <a:t>인접 리스트의 비용은 소요시간 (length / speed)</a:t>
-            </a:r>
-          </a:p>
-          <a:p>
-            <a:pPr/>
-            <a:r>
-              <a:t>HW1 (4주차 09-22 마감) — 오늘 내용과 다음 주 다익스트라</a:t>
-            </a:r>
-          </a:p>
-          <a:p>
-            <a:pPr lvl="1"/>
-            <a:r>
-              <a:t>A부는 오늘 만든 인접 리스트를 load_road_graph와 대조</a:t>
-            </a:r>
-          </a:p>
-          <a:p>
-            <a:pPr lvl="1"/>
-            <a:r>
-              <a:t>채점 대상은 코드가 아니라 대조 결과와 해석 문장</a:t>
-            </a:r>
-          </a:p>
-        </p:txBody>
-      </p:sp>
-      <p:sp>
-        <p:nvSpPr>
-          <p:cNvPr id="25" name="Slide Number Placeholder 0"/>
-          <p:cNvSpPr>
-            <a:spLocks noGrp="1"/>
-          </p:cNvSpPr>
-          <p:nvPr>
-            <p:ph type="sldNum" sz="quarter" idx="4294967295"/>
-          </p:nvPr>
-        </p:nvSpPr>
-        <p:spPr>
-          <a:xfrm>
-            <a:off x="10591495" y="6355080"/>
-            <a:ext cx="914400" cy="274320"/>
-          </a:xfrm>
-          <a:prstGeom prst="rect">
-            <a:avLst/>
-          </a:prstGeom>
-          <a:extLst>
-            <a:ext uri="{C572A759-6A51-4108-AA02-DFA0A04FC94B}">
-              <ma14:wrappingTextBoxFlag xmlns:ma14="http://schemas.microsoft.com/office/mac/drawingml/2011/main" val="0"/>
-            </a:ext>
-          </a:extLst>
-        </p:spPr>
-        <p:txBody>
-          <a:bodyPr/>
-          <a:lstStyle>
-            <a:lvl1pPr>
-              <a:defRPr sz="1000">
-                <a:solidFill>
-                  <a:srgbClr val="AFAFAF"/>
-                </a:solidFill>
-                <a:latin typeface="Pretendard Medium"/>
-                <a:ea typeface="Pretendard Medium"/>
-                <a:cs typeface="Pretendard Medium"/>
-              </a:defRPr>
-            </a:lvl1pPr>
-          </a:lstStyle>
-          <a:p>
-            <a:pPr algn="r"/>
-            <a:fld id="{F7021451-1387-4CA6-816F-3879F97B5CBC}" type="slidenum">
-              <a:rPr b="0" lang="en-US"/>
-              <a:t>1004</a:t>
-            </a:fld>
-            <a:endParaRPr lang="en-US"/>
-          </a:p>
-        </p:txBody>
-      </p:sp>
-    </p:spTree>
-  </p:cSld>
-  <p:clrMapOvr>
-    <a:masterClrMapping/>
-  </p:clrMapOvr>
-</p:sld>
-</file>
-
-<file path=ppt/slides/slide21.xml><?xml version="1.0" encoding="utf-8"?>
+<file path=ppt/slides/slide22.xml><?xml version="1.0" encoding="utf-8"?>
 <p:sld xmlns:a="http://schemas.openxmlformats.org/drawingml/2006/main" xmlns:p="http://schemas.openxmlformats.org/presentationml/2006/main" xmlns:r="http://schemas.openxmlformats.org/officeDocument/2006/relationships">
   <p:cSld>
     <p:spTree>
@@ -8869,6 +9495,24 @@
             </a:r>
             <a:r>
               <a:t>학습 목표</a:t>
+            </a:r>
+          </a:p>
+          <a:p>
+            <a:pPr>
+              <a:spcAft>
+                <a:spcPts val="1000"/>
+              </a:spcAft>
+            </a:pPr>
+            <a:r>
+              <a:rPr>
+                <a:solidFill>
+                  <a:srgbClr val="AFAFAF"/>
+                </a:solidFill>
+              </a:rPr>
+              <a:t>1.3  </a:t>
+            </a:r>
+            <a:r>
+              <a:t>교재와 실습을 여는 곳</a:t>
             </a:r>
           </a:p>
         </p:txBody>
@@ -9228,12 +9872,12 @@
       <p:grpSpPr/>
       <p:sp>
         <p:nvSpPr>
-          <p:cNvPr id="2" name="Text Placeholder 1"/>
-          <p:cNvSpPr>
-            <a:spLocks noGrp="1"/>
-          </p:cNvSpPr>
-          <p:nvPr>
-            <p:ph type="body" idx="100"/>
+          <p:cNvPr id="2" name="Title 1"/>
+          <p:cNvSpPr>
+            <a:spLocks noGrp="1"/>
+          </p:cNvSpPr>
+          <p:nvPr>
+            <p:ph type="title" idx="100"/>
           </p:nvPr>
         </p:nvSpPr>
         <p:spPr/>
@@ -9242,19 +9886,19 @@
           <a:lstStyle/>
           <a:p>
             <a:r>
-              <a:t>02</a:t>
-            </a:r>
-          </a:p>
-        </p:txBody>
-      </p:sp>
-      <p:sp>
-        <p:nvSpPr>
-          <p:cNvPr id="3" name="Title 2"/>
-          <p:cNvSpPr>
-            <a:spLocks noGrp="1"/>
-          </p:cNvSpPr>
-          <p:nvPr>
-            <p:ph type="title" idx="101"/>
+              <a:t>1.3 교재와 실습을 여는 곳</a:t>
+            </a:r>
+          </a:p>
+        </p:txBody>
+      </p:sp>
+      <p:sp>
+        <p:nvSpPr>
+          <p:cNvPr id="3" name="Text Placeholder 2"/>
+          <p:cNvSpPr>
+            <a:spLocks noGrp="1"/>
+          </p:cNvSpPr>
+          <p:nvPr>
+            <p:ph type="body" idx="101"/>
           </p:nvPr>
         </p:nvSpPr>
         <p:spPr/>
@@ -9263,7 +9907,7 @@
           <a:lstStyle/>
           <a:p>
             <a:r>
-              <a:t>교재 2.1 도로망은 표 두 개</a:t>
+              <a:t>1. 도입과 학습 목표</a:t>
             </a:r>
           </a:p>
         </p:txBody>
@@ -9283,22 +9927,335 @@
           <a:bodyPr/>
           <a:lstStyle/>
           <a:p>
-            <a:pPr>
-              <a:spcAft>
-                <a:spcPts val="1000"/>
-              </a:spcAft>
-            </a:pPr>
-            <a:r>
-              <a:rPr>
+            <a:pPr/>
+            <a:r>
+              <a:t>저장소: github.com/jihoyeo/mobility-simulation-book — blob/main 아래 경로</a:t>
+            </a:r>
+          </a:p>
+          <a:p>
+            <a:pPr/>
+            <a:r>
+              <a:t>노트북 실행: jupyter lab labs/ch02_road_network.ipynb</a:t>
+            </a:r>
+          </a:p>
+          <a:p>
+            <a:pPr/>
+            <a:r>
+              <a:t>진행 순서: 슬라이드 개요 → 교재 본문 → 실습 노트북</a:t>
+            </a:r>
+          </a:p>
+        </p:txBody>
+      </p:sp>
+      <p:sp>
+        <p:nvSpPr>
+          <p:cNvPr id="5" name="Text Placeholder 4"/>
+          <p:cNvSpPr>
+            <a:spLocks noGrp="1"/>
+          </p:cNvSpPr>
+          <p:nvPr>
+            <p:ph type="body" idx="103"/>
+          </p:nvPr>
+        </p:nvSpPr>
+        <p:spPr/>
+        <p:txBody>
+          <a:bodyPr/>
+          <a:lstStyle/>
+          <a:p>
+            <a:r>
+              <a:t>표 1. 오늘 여는 파일과 경로</a:t>
+            </a:r>
+          </a:p>
+        </p:txBody>
+      </p:sp>
+      <p:graphicFrame>
+        <p:nvGraphicFramePr>
+          <p:cNvPr id="6" name="Table Placeholder 5"/>
+          <p:cNvGraphicFramePr>
+            <a:graphicFrameLocks noGrp="1"/>
+          </p:cNvGraphicFramePr>
+          <p:nvPr>
+            <p:ph type="tbl" idx="104"/>
+          </p:nvPr>
+        </p:nvGraphicFramePr>
+        <p:xfrm>
+          <a:off x="4937760" y="1828800"/>
+          <a:ext cx="6565392" cy="1676400"/>
+        </p:xfrm>
+        <a:graphic>
+          <a:graphicData uri="http://schemas.openxmlformats.org/drawingml/2006/table">
+            <a:tbl>
+              <a:tblPr firstRow="0" bandRow="0" firstCol="0" lastRow="0" lastCol="0" bandCol="0"/>
+              <a:tblGrid>
+                <a:gridCol w="3282696"/>
+                <a:gridCol w="3282696"/>
+              </a:tblGrid>
+              <a:tr h="406400">
+                <a:tc>
+                  <a:txBody>
+                    <a:bodyPr/>
+                    <a:lstStyle/>
+                    <a:p>
+                      <a:r>
+                        <a:rPr sz="1300" b="0">
+                          <a:solidFill>
+                            <a:srgbClr val="FFFFFF"/>
+                          </a:solidFill>
+                          <a:latin typeface="Pretendard Medium"/>
+                        </a:rPr>
+                        <a:t>자료</a:t>
+                      </a:r>
+                    </a:p>
+                  </a:txBody>
+                  <a:tcPr marL="101600" marR="101600" marT="76200" marB="76200" anchor="ctr">
+                    <a:solidFill>
+                      <a:srgbClr val="000000"/>
+                    </a:solidFill>
+                    <a:lnL w="0">
+                      <a:noFill/>
+                    </a:lnL>
+                    <a:lnR w="0">
+                      <a:noFill/>
+                    </a:lnR>
+                    <a:lnT w="0">
+                      <a:noFill/>
+                    </a:lnT>
+                    <a:lnB w="0">
+                      <a:noFill/>
+                    </a:lnB>
+                  </a:tcPr>
+                </a:tc>
+                <a:tc>
+                  <a:txBody>
+                    <a:bodyPr/>
+                    <a:lstStyle/>
+                    <a:p>
+                      <a:r>
+                        <a:rPr sz="1300" b="0">
+                          <a:solidFill>
+                            <a:srgbClr val="FFFFFF"/>
+                          </a:solidFill>
+                          <a:latin typeface="Pretendard Medium"/>
+                        </a:rPr>
+                        <a:t>경로</a:t>
+                      </a:r>
+                    </a:p>
+                  </a:txBody>
+                  <a:tcPr marL="101600" marR="101600" marT="76200" marB="76200" anchor="ctr">
+                    <a:solidFill>
+                      <a:srgbClr val="000000"/>
+                    </a:solidFill>
+                    <a:lnL w="0">
+                      <a:noFill/>
+                    </a:lnL>
+                    <a:lnR w="0">
+                      <a:noFill/>
+                    </a:lnR>
+                    <a:lnT w="0">
+                      <a:noFill/>
+                    </a:lnT>
+                    <a:lnB w="0">
+                      <a:noFill/>
+                    </a:lnB>
+                  </a:tcPr>
+                </a:tc>
+              </a:tr>
+              <a:tr h="635000">
+                <a:tc>
+                  <a:txBody>
+                    <a:bodyPr/>
+                    <a:lstStyle/>
+                    <a:p>
+                      <a:r>
+                        <a:rPr sz="1300" b="1">
+                          <a:solidFill>
+                            <a:srgbClr val="000000"/>
+                          </a:solidFill>
+                          <a:latin typeface="Pretendard"/>
+                        </a:rPr>
+                        <a:t>교재 원고</a:t>
+                      </a:r>
+                    </a:p>
+                  </a:txBody>
+                  <a:tcPr marL="101600" marR="101600" marT="101600" marB="101600" anchor="ctr">
+                    <a:solidFill>
+                      <a:srgbClr val="FFFFFF"/>
+                    </a:solidFill>
+                    <a:lnL w="0">
+                      <a:noFill/>
+                    </a:lnL>
+                    <a:lnR w="0">
+                      <a:noFill/>
+                    </a:lnR>
+                    <a:lnT w="0">
+                      <a:noFill/>
+                    </a:lnT>
+                    <a:lnB w="9525">
+                      <a:solidFill>
+                        <a:srgbClr val="E2E2E2"/>
+                      </a:solidFill>
+                    </a:lnB>
+                  </a:tcPr>
+                </a:tc>
+                <a:tc>
+                  <a:txBody>
+                    <a:bodyPr/>
+                    <a:lstStyle/>
+                    <a:p>
+                      <a:r>
+                        <a:rPr sz="1300" b="0">
+                          <a:solidFill>
+                            <a:srgbClr val="5E5E5E"/>
+                          </a:solidFill>
+                          <a:latin typeface="Pretendard Medium"/>
+                        </a:rPr>
+                        <a:t>ko/ch02_road_network.md</a:t>
+                      </a:r>
+                    </a:p>
+                  </a:txBody>
+                  <a:tcPr marL="101600" marR="101600" marT="101600" marB="101600" anchor="ctr">
+                    <a:solidFill>
+                      <a:srgbClr val="FFFFFF"/>
+                    </a:solidFill>
+                    <a:lnL w="0">
+                      <a:noFill/>
+                    </a:lnL>
+                    <a:lnR w="0">
+                      <a:noFill/>
+                    </a:lnR>
+                    <a:lnT w="0">
+                      <a:noFill/>
+                    </a:lnT>
+                    <a:lnB w="9525">
+                      <a:solidFill>
+                        <a:srgbClr val="E2E2E2"/>
+                      </a:solidFill>
+                    </a:lnB>
+                  </a:tcPr>
+                </a:tc>
+              </a:tr>
+              <a:tr h="635000">
+                <a:tc>
+                  <a:txBody>
+                    <a:bodyPr/>
+                    <a:lstStyle/>
+                    <a:p>
+                      <a:r>
+                        <a:rPr sz="1300" b="1">
+                          <a:solidFill>
+                            <a:srgbClr val="000000"/>
+                          </a:solidFill>
+                          <a:latin typeface="Pretendard"/>
+                        </a:rPr>
+                        <a:t>실습 노트북</a:t>
+                      </a:r>
+                    </a:p>
+                  </a:txBody>
+                  <a:tcPr marL="101600" marR="101600" marT="101600" marB="101600" anchor="ctr">
+                    <a:solidFill>
+                      <a:srgbClr val="FFFFFF"/>
+                    </a:solidFill>
+                    <a:lnL w="0">
+                      <a:noFill/>
+                    </a:lnL>
+                    <a:lnR w="0">
+                      <a:noFill/>
+                    </a:lnR>
+                    <a:lnT w="0">
+                      <a:noFill/>
+                    </a:lnT>
+                    <a:lnB w="9525">
+                      <a:solidFill>
+                        <a:srgbClr val="E2E2E2"/>
+                      </a:solidFill>
+                    </a:lnB>
+                  </a:tcPr>
+                </a:tc>
+                <a:tc>
+                  <a:txBody>
+                    <a:bodyPr/>
+                    <a:lstStyle/>
+                    <a:p>
+                      <a:r>
+                        <a:rPr sz="1300" b="0">
+                          <a:solidFill>
+                            <a:srgbClr val="5E5E5E"/>
+                          </a:solidFill>
+                          <a:latin typeface="Pretendard Medium"/>
+                        </a:rPr>
+                        <a:t>labs/ch02_road_network.ipynb</a:t>
+                      </a:r>
+                    </a:p>
+                  </a:txBody>
+                  <a:tcPr marL="101600" marR="101600" marT="101600" marB="101600" anchor="ctr">
+                    <a:solidFill>
+                      <a:srgbClr val="FFFFFF"/>
+                    </a:solidFill>
+                    <a:lnL w="0">
+                      <a:noFill/>
+                    </a:lnL>
+                    <a:lnR w="0">
+                      <a:noFill/>
+                    </a:lnR>
+                    <a:lnT w="0">
+                      <a:noFill/>
+                    </a:lnT>
+                    <a:lnB w="9525">
+                      <a:solidFill>
+                        <a:srgbClr val="E2E2E2"/>
+                      </a:solidFill>
+                    </a:lnB>
+                  </a:tcPr>
+                </a:tc>
+              </a:tr>
+            </a:tbl>
+          </a:graphicData>
+        </a:graphic>
+      </p:graphicFrame>
+      <p:sp>
+        <p:nvSpPr>
+          <p:cNvPr id="25" name="Slide Number Placeholder 0"/>
+          <p:cNvSpPr>
+            <a:spLocks noGrp="1"/>
+          </p:cNvSpPr>
+          <p:nvPr>
+            <p:ph type="sldNum" sz="quarter" idx="4294967295"/>
+          </p:nvPr>
+        </p:nvSpPr>
+        <p:spPr>
+          <a:xfrm>
+            <a:off x="10591495" y="6355080"/>
+            <a:ext cx="914400" cy="274320"/>
+          </a:xfrm>
+          <a:prstGeom prst="rect">
+            <a:avLst/>
+          </a:prstGeom>
+          <a:extLst>
+            <a:ext uri="{C572A759-6A51-4108-AA02-DFA0A04FC94B}">
+              <ma14:wrappingTextBoxFlag xmlns:ma14="http://schemas.microsoft.com/office/mac/drawingml/2011/main" val="0"/>
+            </a:ext>
+          </a:extLst>
+        </p:spPr>
+        <p:txBody>
+          <a:bodyPr/>
+          <a:lstStyle>
+            <a:lvl1pPr>
+              <a:defRPr sz="1000">
                 <a:solidFill>
                   <a:srgbClr val="AFAFAF"/>
                 </a:solidFill>
-              </a:rPr>
-              <a:t>2.1  </a:t>
-            </a:r>
-            <a:r>
-              <a:t>노드 표와 엣지 표</a:t>
-            </a:r>
+                <a:latin typeface="Pretendard Medium"/>
+                <a:ea typeface="Pretendard Medium"/>
+                <a:cs typeface="Pretendard Medium"/>
+              </a:defRPr>
+            </a:lvl1pPr>
+          </a:lstStyle>
+          <a:p>
+            <a:pPr algn="r"/>
+            <a:fld id="{F7021451-1387-4CA6-816F-3879F97B5CBC}" type="slidenum">
+              <a:rPr b="0" lang="en-US"/>
+              <a:t>1008</a:t>
+            </a:fld>
+            <a:endParaRPr lang="en-US"/>
           </a:p>
         </p:txBody>
       </p:sp>
@@ -9322,12 +10279,12 @@
       <p:grpSpPr/>
       <p:sp>
         <p:nvSpPr>
-          <p:cNvPr id="2" name="Title 1"/>
-          <p:cNvSpPr>
-            <a:spLocks noGrp="1"/>
-          </p:cNvSpPr>
-          <p:nvPr>
-            <p:ph type="title" idx="100"/>
+          <p:cNvPr id="2" name="Text Placeholder 1"/>
+          <p:cNvSpPr>
+            <a:spLocks noGrp="1"/>
+          </p:cNvSpPr>
+          <p:nvPr>
+            <p:ph type="body" idx="100"/>
           </p:nvPr>
         </p:nvSpPr>
         <p:spPr/>
@@ -9336,19 +10293,19 @@
           <a:lstStyle/>
           <a:p>
             <a:r>
-              <a:t>2.1 노드 표와 엣지 표</a:t>
-            </a:r>
-          </a:p>
-        </p:txBody>
-      </p:sp>
-      <p:sp>
-        <p:nvSpPr>
-          <p:cNvPr id="3" name="Text Placeholder 2"/>
-          <p:cNvSpPr>
-            <a:spLocks noGrp="1"/>
-          </p:cNvSpPr>
-          <p:nvPr>
-            <p:ph type="body" idx="101"/>
+              <a:t>02</a:t>
+            </a:r>
+          </a:p>
+        </p:txBody>
+      </p:sp>
+      <p:sp>
+        <p:nvSpPr>
+          <p:cNvPr id="3" name="Title 2"/>
+          <p:cNvSpPr>
+            <a:spLocks noGrp="1"/>
+          </p:cNvSpPr>
+          <p:nvPr>
+            <p:ph type="title" idx="101"/>
           </p:nvPr>
         </p:nvSpPr>
         <p:spPr/>
@@ -9357,7 +10314,7 @@
           <a:lstStyle/>
           <a:p>
             <a:r>
-              <a:t>2. 교재 2.1 도로망은 표 두 개</a:t>
+              <a:t>교재 2.1 도로망은 표 두 개</a:t>
             </a:r>
           </a:p>
         </p:txBody>
@@ -9377,45 +10334,51 @@
           <a:bodyPr/>
           <a:lstStyle/>
           <a:p>
-            <a:pPr/>
-            <a:r>
-              <a:t>하남시: 노드 12,566 · 엣지 28,589</a:t>
-            </a:r>
-          </a:p>
-          <a:p>
-            <a:pPr/>
-            <a:r>
-              <a:t>node_type 거의 전부 교차로</a:t>
-            </a:r>
-          </a:p>
-          <a:p>
-            <a:pPr lvl="1"/>
-            <a:r>
-              <a:t>boundary는 시 경계 절단점</a:t>
-            </a:r>
-          </a:p>
-          <a:p>
-            <a:pPr/>
-            <a:r>
-              <a:t>꺾이기만 하는 중간점은 노드 아님</a:t>
-            </a:r>
-          </a:p>
-          <a:p>
-            <a:pPr/>
-            <a:r>
-              <a:t>length ÷ speed = 구간 소요시간 (3장의 비용)</a:t>
-            </a:r>
-          </a:p>
-        </p:txBody>
-      </p:sp>
-      <p:sp>
-        <p:nvSpPr>
-          <p:cNvPr id="5" name="Text Placeholder 4"/>
-          <p:cNvSpPr>
-            <a:spLocks noGrp="1"/>
-          </p:cNvSpPr>
-          <p:nvPr>
-            <p:ph type="body" idx="103"/>
+            <a:pPr>
+              <a:spcAft>
+                <a:spcPts val="1000"/>
+              </a:spcAft>
+            </a:pPr>
+            <a:r>
+              <a:rPr>
+                <a:solidFill>
+                  <a:srgbClr val="AFAFAF"/>
+                </a:solidFill>
+              </a:rPr>
+              <a:t>2.1  </a:t>
+            </a:r>
+            <a:r>
+              <a:t>노드 표와 엣지 표</a:t>
+            </a:r>
+          </a:p>
+        </p:txBody>
+      </p:sp>
+    </p:spTree>
+  </p:cSld>
+  <p:clrMapOvr>
+    <a:masterClrMapping/>
+  </p:clrMapOvr>
+</p:sld>
+</file>
+
+<file path=ppt/slides/slide8.xml><?xml version="1.0" encoding="utf-8"?>
+<p:sld xmlns:a="http://schemas.openxmlformats.org/drawingml/2006/main" xmlns:p="http://schemas.openxmlformats.org/presentationml/2006/main" xmlns:r="http://schemas.openxmlformats.org/officeDocument/2006/relationships">
+  <p:cSld>
+    <p:spTree>
+      <p:nvGrpSpPr>
+        <p:cNvPr id="1" name=""/>
+        <p:cNvGrpSpPr/>
+        <p:nvPr/>
+      </p:nvGrpSpPr>
+      <p:grpSpPr/>
+      <p:sp>
+        <p:nvSpPr>
+          <p:cNvPr id="2" name="Title 1"/>
+          <p:cNvSpPr>
+            <a:spLocks noGrp="1"/>
+          </p:cNvSpPr>
+          <p:nvPr>
+            <p:ph type="title" idx="100"/>
           </p:nvPr>
         </p:nvSpPr>
         <p:spPr/>
@@ -9424,7 +10387,95 @@
           <a:lstStyle/>
           <a:p>
             <a:r>
-              <a:t>표 1. 도로망을 이루는 두 파일과 주요 컬럼</a:t>
+              <a:t>2.1 노드 표와 엣지 표</a:t>
+            </a:r>
+          </a:p>
+        </p:txBody>
+      </p:sp>
+      <p:sp>
+        <p:nvSpPr>
+          <p:cNvPr id="3" name="Text Placeholder 2"/>
+          <p:cNvSpPr>
+            <a:spLocks noGrp="1"/>
+          </p:cNvSpPr>
+          <p:nvPr>
+            <p:ph type="body" idx="101"/>
+          </p:nvPr>
+        </p:nvSpPr>
+        <p:spPr/>
+        <p:txBody>
+          <a:bodyPr/>
+          <a:lstStyle/>
+          <a:p>
+            <a:r>
+              <a:t>2. 교재 2.1 도로망은 표 두 개</a:t>
+            </a:r>
+          </a:p>
+        </p:txBody>
+      </p:sp>
+      <p:sp>
+        <p:nvSpPr>
+          <p:cNvPr id="4" name="Text Placeholder 3"/>
+          <p:cNvSpPr>
+            <a:spLocks noGrp="1"/>
+          </p:cNvSpPr>
+          <p:nvPr>
+            <p:ph type="body" idx="102"/>
+          </p:nvPr>
+        </p:nvSpPr>
+        <p:spPr/>
+        <p:txBody>
+          <a:bodyPr/>
+          <a:lstStyle/>
+          <a:p>
+            <a:pPr/>
+            <a:r>
+              <a:t>하남시: 노드 12,566 · 엣지 28,589</a:t>
+            </a:r>
+          </a:p>
+          <a:p>
+            <a:pPr/>
+            <a:r>
+              <a:t>node_type 거의 전부 교차로</a:t>
+            </a:r>
+          </a:p>
+          <a:p>
+            <a:pPr lvl="1"/>
+            <a:r>
+              <a:t>boundary는 시 경계 절단점</a:t>
+            </a:r>
+          </a:p>
+          <a:p>
+            <a:pPr/>
+            <a:r>
+              <a:t>꺾이기만 하는 중간점은 노드 아님</a:t>
+            </a:r>
+          </a:p>
+          <a:p>
+            <a:pPr/>
+            <a:r>
+              <a:t>length ÷ speed = 구간 소요시간 (3장의 비용)</a:t>
+            </a:r>
+          </a:p>
+        </p:txBody>
+      </p:sp>
+      <p:sp>
+        <p:nvSpPr>
+          <p:cNvPr id="5" name="Text Placeholder 4"/>
+          <p:cNvSpPr>
+            <a:spLocks noGrp="1"/>
+          </p:cNvSpPr>
+          <p:nvPr>
+            <p:ph type="body" idx="103"/>
+          </p:nvPr>
+        </p:nvSpPr>
+        <p:spPr/>
+        <p:txBody>
+          <a:bodyPr/>
+          <a:lstStyle/>
+          <a:p>
+            <a:r>
+              <a:t>표 2. 도로망을 이루는 두 파일과 주요 컬럼</a:t>
             </a:r>
           </a:p>
         </p:txBody>
@@ -9836,136 +10887,6 @@
 </p:sld>
 </file>
 
-<file path=ppt/slides/slide8.xml><?xml version="1.0" encoding="utf-8"?>
-<p:sld xmlns:a="http://schemas.openxmlformats.org/drawingml/2006/main" xmlns:p="http://schemas.openxmlformats.org/presentationml/2006/main" xmlns:r="http://schemas.openxmlformats.org/officeDocument/2006/relationships">
-  <p:cSld>
-    <p:spTree>
-      <p:nvGrpSpPr>
-        <p:cNvPr id="1" name=""/>
-        <p:cNvGrpSpPr/>
-        <p:nvPr/>
-      </p:nvGrpSpPr>
-      <p:grpSpPr/>
-      <p:sp>
-        <p:nvSpPr>
-          <p:cNvPr id="2" name="Text Placeholder 1"/>
-          <p:cNvSpPr>
-            <a:spLocks noGrp="1"/>
-          </p:cNvSpPr>
-          <p:nvPr>
-            <p:ph type="body" idx="100"/>
-          </p:nvPr>
-        </p:nvSpPr>
-        <p:spPr/>
-        <p:txBody>
-          <a:bodyPr/>
-          <a:lstStyle/>
-          <a:p>
-            <a:r>
-              <a:t>03</a:t>
-            </a:r>
-          </a:p>
-        </p:txBody>
-      </p:sp>
-      <p:sp>
-        <p:nvSpPr>
-          <p:cNvPr id="3" name="Title 2"/>
-          <p:cNvSpPr>
-            <a:spLocks noGrp="1"/>
-          </p:cNvSpPr>
-          <p:nvPr>
-            <p:ph type="title" idx="101"/>
-          </p:nvPr>
-        </p:nvSpPr>
-        <p:spPr/>
-        <p:txBody>
-          <a:bodyPr/>
-          <a:lstStyle/>
-          <a:p>
-            <a:r>
-              <a:t>교재 2.2 양 끝 노드 찾기</a:t>
-            </a:r>
-          </a:p>
-        </p:txBody>
-      </p:sp>
-      <p:sp>
-        <p:nvSpPr>
-          <p:cNvPr id="4" name="Text Placeholder 3"/>
-          <p:cNvSpPr>
-            <a:spLocks noGrp="1"/>
-          </p:cNvSpPr>
-          <p:nvPr>
-            <p:ph type="body" idx="102"/>
-          </p:nvPr>
-        </p:nvSpPr>
-        <p:spPr/>
-        <p:txBody>
-          <a:bodyPr/>
-          <a:lstStyle/>
-          <a:p>
-            <a:pPr>
-              <a:spcAft>
-                <a:spcPts val="1000"/>
-              </a:spcAft>
-            </a:pPr>
-            <a:r>
-              <a:rPr>
-                <a:solidFill>
-                  <a:srgbClr val="AFAFAF"/>
-                </a:solidFill>
-              </a:rPr>
-              <a:t>3.1  </a:t>
-            </a:r>
-            <a:r>
-              <a:t>edge_id 안에 있는 양 끝 노드</a:t>
-            </a:r>
-          </a:p>
-          <a:p>
-            <a:pPr>
-              <a:spcAft>
-                <a:spcPts val="1000"/>
-              </a:spcAft>
-            </a:pPr>
-            <a:r>
-              <a:rPr>
-                <a:solidFill>
-                  <a:srgbClr val="AFAFAF"/>
-                </a:solidFill>
-              </a:rPr>
-              <a:t>3.2  </a:t>
-            </a:r>
-            <a:r>
-              <a:t>짐작한 규칙은 그 자리에서 검증</a:t>
-            </a:r>
-          </a:p>
-          <a:p>
-            <a:pPr>
-              <a:spcAft>
-                <a:spcPts val="1000"/>
-              </a:spcAft>
-            </a:pPr>
-            <a:r>
-              <a:rPr>
-                <a:solidFill>
-                  <a:srgbClr val="AFAFAF"/>
-                </a:solidFill>
-              </a:rPr>
-              <a:t>3.3  </a:t>
-            </a:r>
-            <a:r>
-              <a:t>방향 f와 r</a:t>
-            </a:r>
-          </a:p>
-        </p:txBody>
-      </p:sp>
-    </p:spTree>
-  </p:cSld>
-  <p:clrMapOvr>
-    <a:masterClrMapping/>
-  </p:clrMapOvr>
-</p:sld>
-</file>
-
 <file path=ppt/slides/slide9.xml><?xml version="1.0" encoding="utf-8"?>
 <p:sld xmlns:a="http://schemas.openxmlformats.org/drawingml/2006/main" xmlns:p="http://schemas.openxmlformats.org/presentationml/2006/main" xmlns:r="http://schemas.openxmlformats.org/officeDocument/2006/relationships">
   <p:cSld>
@@ -9978,12 +10899,12 @@
       <p:grpSpPr/>
       <p:sp>
         <p:nvSpPr>
-          <p:cNvPr id="2" name="Title 1"/>
-          <p:cNvSpPr>
-            <a:spLocks noGrp="1"/>
-          </p:cNvSpPr>
-          <p:nvPr>
-            <p:ph type="title" idx="100"/>
+          <p:cNvPr id="2" name="Text Placeholder 1"/>
+          <p:cNvSpPr>
+            <a:spLocks noGrp="1"/>
+          </p:cNvSpPr>
+          <p:nvPr>
+            <p:ph type="body" idx="100"/>
           </p:nvPr>
         </p:nvSpPr>
         <p:spPr/>
@@ -9992,19 +10913,19 @@
           <a:lstStyle/>
           <a:p>
             <a:r>
-              <a:t>3.1 edge_id 안에 있는 양 끝 노드</a:t>
-            </a:r>
-          </a:p>
-        </p:txBody>
-      </p:sp>
-      <p:sp>
-        <p:nvSpPr>
-          <p:cNvPr id="3" name="Text Placeholder 2"/>
-          <p:cNvSpPr>
-            <a:spLocks noGrp="1"/>
-          </p:cNvSpPr>
-          <p:nvPr>
-            <p:ph type="body" idx="101"/>
+              <a:t>03</a:t>
+            </a:r>
+          </a:p>
+        </p:txBody>
+      </p:sp>
+      <p:sp>
+        <p:nvSpPr>
+          <p:cNvPr id="3" name="Title 2"/>
+          <p:cNvSpPr>
+            <a:spLocks noGrp="1"/>
+          </p:cNvSpPr>
+          <p:nvPr>
+            <p:ph type="title" idx="101"/>
           </p:nvPr>
         </p:nvSpPr>
         <p:spPr/>
@@ -10013,7 +10934,7 @@
           <a:lstStyle/>
           <a:p>
             <a:r>
-              <a:t>3. 교재 2.2 양 끝 노드 찾기</a:t>
+              <a:t>교재 2.2 양 끝 노드 찾기</a:t>
             </a:r>
           </a:p>
         </p:txBody>
@@ -10033,483 +10954,58 @@
           <a:bodyPr/>
           <a:lstStyle/>
           <a:p>
-            <a:pPr/>
-            <a:r>
-              <a:t>엣지 표에 source·target 컬럼 없음</a:t>
-            </a:r>
-          </a:p>
-          <a:p>
-            <a:pPr/>
-            <a:r>
-              <a:t>node_id = OSM 번호 앞에 n</a:t>
-            </a:r>
-          </a:p>
-          <a:p>
-            <a:pPr/>
-            <a:r>
-              <a:t>rsplit("_", 2)로 뒤 두 부분 분리</a:t>
-            </a:r>
-          </a:p>
-        </p:txBody>
-      </p:sp>
-      <p:sp>
-        <p:nvSpPr>
-          <p:cNvPr id="5" name="Text Placeholder 4"/>
-          <p:cNvSpPr>
-            <a:spLocks noGrp="1"/>
-          </p:cNvSpPr>
-          <p:nvPr>
-            <p:ph type="body" idx="103"/>
-          </p:nvPr>
-        </p:nvSpPr>
-        <p:spPr/>
-        <p:txBody>
-          <a:bodyPr/>
-          <a:lstStyle/>
-          <a:p>
-            <a:r>
-              <a:t>표 2. e37375263_f_445273230_436257996을 나눈 네 부분</a:t>
-            </a:r>
-          </a:p>
-        </p:txBody>
-      </p:sp>
-      <p:graphicFrame>
-        <p:nvGraphicFramePr>
-          <p:cNvPr id="6" name="Table Placeholder 5"/>
-          <p:cNvGraphicFramePr>
-            <a:graphicFrameLocks noGrp="1"/>
-          </p:cNvGraphicFramePr>
-          <p:nvPr>
-            <p:ph type="tbl" idx="104"/>
-          </p:nvPr>
-        </p:nvGraphicFramePr>
-        <p:xfrm>
-          <a:off x="4937760" y="1828800"/>
-          <a:ext cx="6565392" cy="2946400"/>
-        </p:xfrm>
-        <a:graphic>
-          <a:graphicData uri="http://schemas.openxmlformats.org/drawingml/2006/table">
-            <a:tbl>
-              <a:tblPr firstRow="0" bandRow="0" firstCol="0" lastRow="0" lastCol="0" bandCol="0"/>
-              <a:tblGrid>
-                <a:gridCol w="3282696"/>
-                <a:gridCol w="3282696"/>
-              </a:tblGrid>
-              <a:tr h="406400">
-                <a:tc>
-                  <a:txBody>
-                    <a:bodyPr/>
-                    <a:lstStyle/>
-                    <a:p>
-                      <a:r>
-                        <a:rPr sz="1300" b="0">
-                          <a:solidFill>
-                            <a:srgbClr val="FFFFFF"/>
-                          </a:solidFill>
-                          <a:latin typeface="Pretendard Medium"/>
-                        </a:rPr>
-                        <a:t>부분</a:t>
-                      </a:r>
-                    </a:p>
-                  </a:txBody>
-                  <a:tcPr marL="101600" marR="101600" marT="76200" marB="76200" anchor="ctr">
-                    <a:solidFill>
-                      <a:srgbClr val="000000"/>
-                    </a:solidFill>
-                    <a:lnL w="0">
-                      <a:noFill/>
-                    </a:lnL>
-                    <a:lnR w="0">
-                      <a:noFill/>
-                    </a:lnR>
-                    <a:lnT w="0">
-                      <a:noFill/>
-                    </a:lnT>
-                    <a:lnB w="0">
-                      <a:noFill/>
-                    </a:lnB>
-                  </a:tcPr>
-                </a:tc>
-                <a:tc>
-                  <a:txBody>
-                    <a:bodyPr/>
-                    <a:lstStyle/>
-                    <a:p>
-                      <a:r>
-                        <a:rPr sz="1300" b="0">
-                          <a:solidFill>
-                            <a:srgbClr val="FFFFFF"/>
-                          </a:solidFill>
-                          <a:latin typeface="Pretendard Medium"/>
-                        </a:rPr>
-                        <a:t>뜻</a:t>
-                      </a:r>
-                    </a:p>
-                  </a:txBody>
-                  <a:tcPr marL="101600" marR="101600" marT="76200" marB="76200" anchor="ctr">
-                    <a:solidFill>
-                      <a:srgbClr val="000000"/>
-                    </a:solidFill>
-                    <a:lnL w="0">
-                      <a:noFill/>
-                    </a:lnL>
-                    <a:lnR w="0">
-                      <a:noFill/>
-                    </a:lnR>
-                    <a:lnT w="0">
-                      <a:noFill/>
-                    </a:lnT>
-                    <a:lnB w="0">
-                      <a:noFill/>
-                    </a:lnB>
-                  </a:tcPr>
-                </a:tc>
-              </a:tr>
-              <a:tr h="635000">
-                <a:tc>
-                  <a:txBody>
-                    <a:bodyPr/>
-                    <a:lstStyle/>
-                    <a:p>
-                      <a:r>
-                        <a:rPr sz="1300" b="1">
-                          <a:solidFill>
-                            <a:srgbClr val="000000"/>
-                          </a:solidFill>
-                          <a:latin typeface="Pretendard"/>
-                        </a:rPr>
-                        <a:t>e37375263</a:t>
-                      </a:r>
-                    </a:p>
-                  </a:txBody>
-                  <a:tcPr marL="101600" marR="101600" marT="101600" marB="101600" anchor="ctr">
-                    <a:solidFill>
-                      <a:srgbClr val="FFFFFF"/>
-                    </a:solidFill>
-                    <a:lnL w="0">
-                      <a:noFill/>
-                    </a:lnL>
-                    <a:lnR w="0">
-                      <a:noFill/>
-                    </a:lnR>
-                    <a:lnT w="0">
-                      <a:noFill/>
-                    </a:lnT>
-                    <a:lnB w="9525">
-                      <a:solidFill>
-                        <a:srgbClr val="E2E2E2"/>
-                      </a:solidFill>
-                    </a:lnB>
-                  </a:tcPr>
-                </a:tc>
-                <a:tc>
-                  <a:txBody>
-                    <a:bodyPr/>
-                    <a:lstStyle/>
-                    <a:p>
-                      <a:r>
-                        <a:rPr sz="1300" b="0">
-                          <a:solidFill>
-                            <a:srgbClr val="5E5E5E"/>
-                          </a:solidFill>
-                          <a:latin typeface="Pretendard Medium"/>
-                        </a:rPr>
-                        <a:t>소속 OSM 도로(way) 번호</a:t>
-                      </a:r>
-                    </a:p>
-                  </a:txBody>
-                  <a:tcPr marL="101600" marR="101600" marT="101600" marB="101600" anchor="ctr">
-                    <a:solidFill>
-                      <a:srgbClr val="FFFFFF"/>
-                    </a:solidFill>
-                    <a:lnL w="0">
-                      <a:noFill/>
-                    </a:lnL>
-                    <a:lnR w="0">
-                      <a:noFill/>
-                    </a:lnR>
-                    <a:lnT w="0">
-                      <a:noFill/>
-                    </a:lnT>
-                    <a:lnB w="9525">
-                      <a:solidFill>
-                        <a:srgbClr val="E2E2E2"/>
-                      </a:solidFill>
-                    </a:lnB>
-                  </a:tcPr>
-                </a:tc>
-              </a:tr>
-              <a:tr h="635000">
-                <a:tc>
-                  <a:txBody>
-                    <a:bodyPr/>
-                    <a:lstStyle/>
-                    <a:p>
-                      <a:r>
-                        <a:rPr sz="1300" b="1">
-                          <a:solidFill>
-                            <a:srgbClr val="000000"/>
-                          </a:solidFill>
-                          <a:latin typeface="Pretendard"/>
-                        </a:rPr>
-                        <a:t>f</a:t>
-                      </a:r>
-                    </a:p>
-                  </a:txBody>
-                  <a:tcPr marL="101600" marR="101600" marT="101600" marB="101600" anchor="ctr">
-                    <a:solidFill>
-                      <a:srgbClr val="FFFFFF"/>
-                    </a:solidFill>
-                    <a:lnL w="0">
-                      <a:noFill/>
-                    </a:lnL>
-                    <a:lnR w="0">
-                      <a:noFill/>
-                    </a:lnR>
-                    <a:lnT w="0">
-                      <a:noFill/>
-                    </a:lnT>
-                    <a:lnB w="9525">
-                      <a:solidFill>
-                        <a:srgbClr val="E2E2E2"/>
-                      </a:solidFill>
-                    </a:lnB>
-                  </a:tcPr>
-                </a:tc>
-                <a:tc>
-                  <a:txBody>
-                    <a:bodyPr/>
-                    <a:lstStyle/>
-                    <a:p>
-                      <a:r>
-                        <a:rPr sz="1300" b="0">
-                          <a:solidFill>
-                            <a:srgbClr val="5E5E5E"/>
-                          </a:solidFill>
-                          <a:latin typeface="Pretendard Medium"/>
-                        </a:rPr>
-                        <a:t>방향 — f 정방향, r 역방향</a:t>
-                      </a:r>
-                    </a:p>
-                  </a:txBody>
-                  <a:tcPr marL="101600" marR="101600" marT="101600" marB="101600" anchor="ctr">
-                    <a:solidFill>
-                      <a:srgbClr val="FFFFFF"/>
-                    </a:solidFill>
-                    <a:lnL w="0">
-                      <a:noFill/>
-                    </a:lnL>
-                    <a:lnR w="0">
-                      <a:noFill/>
-                    </a:lnR>
-                    <a:lnT w="0">
-                      <a:noFill/>
-                    </a:lnT>
-                    <a:lnB w="9525">
-                      <a:solidFill>
-                        <a:srgbClr val="E2E2E2"/>
-                      </a:solidFill>
-                    </a:lnB>
-                  </a:tcPr>
-                </a:tc>
-              </a:tr>
-              <a:tr h="635000">
-                <a:tc>
-                  <a:txBody>
-                    <a:bodyPr/>
-                    <a:lstStyle/>
-                    <a:p>
-                      <a:r>
-                        <a:rPr sz="1300" b="1">
-                          <a:solidFill>
-                            <a:srgbClr val="000000"/>
-                          </a:solidFill>
-                          <a:latin typeface="Pretendard"/>
-                        </a:rPr>
-                        <a:t>445273230</a:t>
-                      </a:r>
-                    </a:p>
-                  </a:txBody>
-                  <a:tcPr marL="101600" marR="101600" marT="101600" marB="101600" anchor="ctr">
-                    <a:solidFill>
-                      <a:srgbClr val="FFFFFF"/>
-                    </a:solidFill>
-                    <a:lnL w="0">
-                      <a:noFill/>
-                    </a:lnL>
-                    <a:lnR w="0">
-                      <a:noFill/>
-                    </a:lnR>
-                    <a:lnT w="0">
-                      <a:noFill/>
-                    </a:lnT>
-                    <a:lnB w="9525">
-                      <a:solidFill>
-                        <a:srgbClr val="E2E2E2"/>
-                      </a:solidFill>
-                    </a:lnB>
-                  </a:tcPr>
-                </a:tc>
-                <a:tc>
-                  <a:txBody>
-                    <a:bodyPr/>
-                    <a:lstStyle/>
-                    <a:p>
-                      <a:r>
-                        <a:rPr sz="1300" b="0">
-                          <a:solidFill>
-                            <a:srgbClr val="5E5E5E"/>
-                          </a:solidFill>
-                          <a:latin typeface="Pretendard Medium"/>
-                        </a:rPr>
-                        <a:t>출발 노드 OSM 번호</a:t>
-                      </a:r>
-                    </a:p>
-                  </a:txBody>
-                  <a:tcPr marL="101600" marR="101600" marT="101600" marB="101600" anchor="ctr">
-                    <a:solidFill>
-                      <a:srgbClr val="FFFFFF"/>
-                    </a:solidFill>
-                    <a:lnL w="0">
-                      <a:noFill/>
-                    </a:lnL>
-                    <a:lnR w="0">
-                      <a:noFill/>
-                    </a:lnR>
-                    <a:lnT w="0">
-                      <a:noFill/>
-                    </a:lnT>
-                    <a:lnB w="9525">
-                      <a:solidFill>
-                        <a:srgbClr val="E2E2E2"/>
-                      </a:solidFill>
-                    </a:lnB>
-                  </a:tcPr>
-                </a:tc>
-              </a:tr>
-              <a:tr h="635000">
-                <a:tc>
-                  <a:txBody>
-                    <a:bodyPr/>
-                    <a:lstStyle/>
-                    <a:p>
-                      <a:r>
-                        <a:rPr sz="1300" b="1">
-                          <a:solidFill>
-                            <a:srgbClr val="000000"/>
-                          </a:solidFill>
-                          <a:latin typeface="Pretendard"/>
-                        </a:rPr>
-                        <a:t>436257996</a:t>
-                      </a:r>
-                    </a:p>
-                  </a:txBody>
-                  <a:tcPr marL="101600" marR="101600" marT="101600" marB="101600" anchor="ctr">
-                    <a:solidFill>
-                      <a:srgbClr val="FFFFFF"/>
-                    </a:solidFill>
-                    <a:lnL w="0">
-                      <a:noFill/>
-                    </a:lnL>
-                    <a:lnR w="0">
-                      <a:noFill/>
-                    </a:lnR>
-                    <a:lnT w="0">
-                      <a:noFill/>
-                    </a:lnT>
-                    <a:lnB w="9525">
-                      <a:solidFill>
-                        <a:srgbClr val="E2E2E2"/>
-                      </a:solidFill>
-                    </a:lnB>
-                  </a:tcPr>
-                </a:tc>
-                <a:tc>
-                  <a:txBody>
-                    <a:bodyPr/>
-                    <a:lstStyle/>
-                    <a:p>
-                      <a:r>
-                        <a:rPr sz="1300" b="0">
-                          <a:solidFill>
-                            <a:srgbClr val="5E5E5E"/>
-                          </a:solidFill>
-                          <a:latin typeface="Pretendard Medium"/>
-                        </a:rPr>
-                        <a:t>도착 노드 OSM 번호</a:t>
-                      </a:r>
-                    </a:p>
-                  </a:txBody>
-                  <a:tcPr marL="101600" marR="101600" marT="101600" marB="101600" anchor="ctr">
-                    <a:solidFill>
-                      <a:srgbClr val="FFFFFF"/>
-                    </a:solidFill>
-                    <a:lnL w="0">
-                      <a:noFill/>
-                    </a:lnL>
-                    <a:lnR w="0">
-                      <a:noFill/>
-                    </a:lnR>
-                    <a:lnT w="0">
-                      <a:noFill/>
-                    </a:lnT>
-                    <a:lnB w="9525">
-                      <a:solidFill>
-                        <a:srgbClr val="E2E2E2"/>
-                      </a:solidFill>
-                    </a:lnB>
-                  </a:tcPr>
-                </a:tc>
-              </a:tr>
-            </a:tbl>
-          </a:graphicData>
-        </a:graphic>
-      </p:graphicFrame>
-      <p:sp>
-        <p:nvSpPr>
-          <p:cNvPr id="25" name="Slide Number Placeholder 0"/>
-          <p:cNvSpPr>
-            <a:spLocks noGrp="1"/>
-          </p:cNvSpPr>
-          <p:nvPr>
-            <p:ph type="sldNum" sz="quarter" idx="4294967295"/>
-          </p:nvPr>
-        </p:nvSpPr>
-        <p:spPr>
-          <a:xfrm>
-            <a:off x="10591495" y="6355080"/>
-            <a:ext cx="914400" cy="274320"/>
-          </a:xfrm>
-          <a:prstGeom prst="rect">
-            <a:avLst/>
-          </a:prstGeom>
-          <a:extLst>
-            <a:ext uri="{C572A759-6A51-4108-AA02-DFA0A04FC94B}">
-              <ma14:wrappingTextBoxFlag xmlns:ma14="http://schemas.microsoft.com/office/mac/drawingml/2011/main" val="0"/>
-            </a:ext>
-          </a:extLst>
-        </p:spPr>
-        <p:txBody>
-          <a:bodyPr/>
-          <a:lstStyle>
-            <a:lvl1pPr>
-              <a:defRPr sz="1000">
+            <a:pPr>
+              <a:spcAft>
+                <a:spcPts val="1000"/>
+              </a:spcAft>
+            </a:pPr>
+            <a:r>
+              <a:rPr>
                 <a:solidFill>
                   <a:srgbClr val="AFAFAF"/>
                 </a:solidFill>
-                <a:latin typeface="Pretendard Medium"/>
-                <a:ea typeface="Pretendard Medium"/>
-                <a:cs typeface="Pretendard Medium"/>
-              </a:defRPr>
-            </a:lvl1pPr>
-          </a:lstStyle>
-          <a:p>
-            <a:pPr algn="r"/>
-            <a:fld id="{F7021451-1387-4CA6-816F-3879F97B5CBC}" type="slidenum">
-              <a:rPr b="0" lang="en-US"/>
-              <a:t>1008</a:t>
-            </a:fld>
-            <a:endParaRPr lang="en-US"/>
+              </a:rPr>
+              <a:t>3.1  </a:t>
+            </a:r>
+            <a:r>
+              <a:t>edge_id 안에 있는 양 끝 노드</a:t>
+            </a:r>
+          </a:p>
+          <a:p>
+            <a:pPr>
+              <a:spcAft>
+                <a:spcPts val="1000"/>
+              </a:spcAft>
+            </a:pPr>
+            <a:r>
+              <a:rPr>
+                <a:solidFill>
+                  <a:srgbClr val="AFAFAF"/>
+                </a:solidFill>
+              </a:rPr>
+              <a:t>3.2  </a:t>
+            </a:r>
+            <a:r>
+              <a:t>짐작한 규칙은 그 자리에서 검증</a:t>
+            </a:r>
+          </a:p>
+          <a:p>
+            <a:pPr>
+              <a:spcAft>
+                <a:spcPts val="1000"/>
+              </a:spcAft>
+            </a:pPr>
+            <a:r>
+              <a:rPr>
+                <a:solidFill>
+                  <a:srgbClr val="AFAFAF"/>
+                </a:solidFill>
+              </a:rPr>
+              <a:t>3.3  </a:t>
+            </a:r>
+            <a:r>
+              <a:t>방향 f와 r</a:t>
+            </a:r>
           </a:p>
         </p:txBody>
       </p:sp>

--- a/slides/week02/ch02_road_network.pptx
+++ b/slides/week02/ch02_road_network.pptx
@@ -592,7 +592,7 @@
           <a:lstStyle/>
           <a:p>
             <a:r>
-              <a:t>DRIVE 집합의 원소를 교재에서 하나씩 읽어 준다. 왜 service와 road가 들어가는지 물어보면 좋다.</a:t>
+              <a:t>교재의 DRIVE 집합을 함께 확인합니다. service와 road가 자동차용 집합에 포함된 이유를 학생들에게 질문하고, 각각 주차장 진입로·이면도로와 분류가 불명확한 도로에 해당한다는 점을 설명합니다.</a:t>
             </a:r>
           </a:p>
         </p:txBody>
@@ -662,7 +662,7 @@
           <a:lstStyle/>
           <a:p>
             <a:r>
-              <a:t>만든 결과는 load_road_graph("hanam", modes=("drive",))와 노드·엣지 수를 대조한다. modes가 방금 만든 DRIVE 필터에 해당하고, 3장부터는 이걸 쓴다.</a:t>
+              <a:t>직접 만든 인접 리스트의 노드·엣지 수를 load_road_graph("hanam", modes=("drive",))의 결과와 대조합니다. modes=("drive",)가 앞에서 만든 DRIVE 필터에 해당하며, 3장부터는 load_road_graph가 반환한 도로망을 사용합니다.</a:t>
             </a:r>
           </a:p>
         </p:txBody>
@@ -732,7 +732,7 @@
           <a:lstStyle/>
           <a:p>
             <a:r>
-              <a:t>노드 좌표가 고정이라는 점을 이용한다. RoadGraph.nearest_node가 이 방식이다. KD-트리는 위경도 차이로 거리를 재므로 왜곡이 있고, 정확한 거리가 필요하면 하버사인으로 다시 계산한다.</a:t>
+              <a:t>노드 좌표가 변하지 않는다는 점을 이용해 KD-트리를 한 번 구축합니다. RoadGraph.nearest_node도 같은 방식을 사용합니다. KD-트리는 위경도 좌표의 차이로 거리를 계산하므로 왜곡이 있습니다. 정확한 거리가 필요하면 선택된 노드까지의 거리를 하버사인 공식으로 다시 계산합니다.</a:t>
             </a:r>
           </a:p>
         </p:txBody>
@@ -802,7 +802,7 @@
           <a:lstStyle/>
           <a:p>
             <a:r>
-              <a:t>숫자를 내는 것으로 끝내지 않는다. 평균 차수 2가 무엇을 뜻하는지 학생이 먼저 말하게 한다.</a:t>
+              <a:t>계산 결과만 제시하지 않고 각 숫자가 도로망의 어떤 특성을 뜻하는지 해석합니다. 평균 차수 약 2가 의미하는 구조를 학생들이 먼저 설명하도록 요청합니다.</a:t>
             </a:r>
           </a:p>
         </p:txBody>
@@ -872,7 +872,7 @@
           <a:lstStyle/>
           <a:p>
             <a:r>
-              <a:t>HW1 명세는 assignments/hw1.md에 있고 오늘 배포한다. 다음 주 3장에서 이 인접 리스트 위에 다익스트라를 약 90줄로 짠다. 시간이 남으면 연습 2.3(WKB 형상)을 시연하고, 직선 엣지와 실제 형상의 차이가 3장 거리 오차로 이어진다는 점을 예고한다.</a:t>
+              <a:t>HW1 명세는 assignments/hw1.md에서 확인하며 이번 주에 배포합니다. 다음 주에는 이 인접 리스트를 이용해 약 90줄의 다익스트라 알고리즘을 직접 구현합니다. 시간이 남으면 연습 2.3의 WKB 형상을 시연하고, 엣지를 직선으로 표현할 때 생기는 거리 오차를 설명합니다.</a:t>
             </a:r>
           </a:p>
         </p:txBody>
@@ -942,7 +942,7 @@
           <a:lstStyle/>
           <a:p>
             <a:r>
-              <a:t>0장에서 하남시청에서 미사역까지 몇 분 걸리는지 시뮬레이터가 알아서 계산했다. 그때 무슨 자료를 썼는지 오늘 확인한다. 3장에서 이 표를 최단경로용 자료구조로 바꾼다.</a:t>
+              <a:t>0장에서는 하남시청에서 미사역까지의 소요시간을 시뮬레이터가 계산했습니다. 이번 장에서는 그 계산에 사용한 도로망 데이터를 직접 확인합니다. 이후 3장에서 이 표를 최단경로 계산에 사용할 자료구조로 바꿉니다.</a:t>
             </a:r>
           </a:p>
         </p:txBody>
@@ -1012,7 +1012,7 @@
           <a:lstStyle/>
           <a:p>
             <a:r>
-              <a:t>교재 2장 학습 목표와 같다. 화요일이 앞의 세 개, 수요일이 마지막 하나와 실습이다.</a:t>
+              <a:t>교재 2장의 학습 목표와 같습니다. 화요일에는 앞의 세 항목을 다루고, 수요일에는 좌표 스냅과 실습을 진행합니다.</a:t>
             </a:r>
           </a:p>
         </p:txBody>
@@ -1152,7 +1152,7 @@
           <a:lstStyle/>
           <a:p>
             <a:r>
-              <a:t>교차로와 교차로 사이를 엣지 하나로 표현했기 때문에 노드 수가 적어 보인다. 속도는 막히지 않았을 때의 값이고, 4장에서 시간대별 실측 속도로 바꾼다.</a:t>
+              <a:t>교차로와 교차로 사이의 구간을 엣지 하나로 표현하기 때문에 노드 수가 적어 보입니다. free_flow_speed_kmh는 혼잡이 없을 때의 속도이며, 4장에서 시간대별 실측 속도로 교체합니다.</a:t>
             </a:r>
           </a:p>
         </p:txBody>
@@ -1222,7 +1222,7 @@
           <a:lstStyle/>
           <a:p>
             <a:r>
-              <a:t>여기서 학생들이 처음 막힌다. 컬럼 목록을 먼저 출력해서 없다는 것을 확인시킨 뒤에 edge_id를 보여준다.</a:t>
+              <a:t>먼저 엣지 표의 컬럼 목록을 출력해 source와 target이 없다는 사실을 확인합니다. 그다음 edge_id의 구조를 살펴보고 출발 노드와 도착 노드를 찾습니다.</a:t>
             </a:r>
           </a:p>
         </p:txBody>
@@ -1292,7 +1292,7 @@
           <a:lstStyle/>
           <a:p>
             <a:r>
-              <a:t>규칙을 짐작했으면 그 자리에서 검증하는 것이 나중에 원인을 찾는 것보다 비용이 훨씬 적다. 이 습관이 이 과목에서 가장 오래 남는다.</a:t>
+              <a:t>데이터의 규칙을 추정했다면 바로 기준 자료와 대조해야 합니다. 여기서는 osm_node_seq_json의 첫 원소와 마지막 원소를 기준으로 2,000건을 확인합니다. 이 검증을 미루면 이후 잘못된 경로가 나왔을 때 원인을 찾기 어렵습니다.</a:t>
             </a:r>
           </a:p>
         </p:txBody>
@@ -1362,7 +1362,7 @@
           <a:lstStyle/>
           <a:p>
             <a:r>
-              <a:t>direction과 oneway의 분포를 교재에서 함께 출력해 확인한다.</a:t>
+              <a:t>교재에서 direction과 oneway의 분포를 직접 출력합니다. 양방향 도로는 두 행, 일방통행은 한 행으로 저장된다는 점을 결과에서 확인합니다.</a:t>
             </a:r>
           </a:p>
         </p:txBody>
@@ -1432,7 +1432,7 @@
           <a:lstStyle/>
           <a:p>
             <a:r>
-              <a:t>highway 최다 항목은 보도(footway)다. 보행·자전거 전용이 전체 엣지의 절반을 넘는다. 거르지 않고 자동차 최단경로를 구하면 계단으로 내려가고 산책로를 가로지르는 경로가 나온다. 거리는 짧지만 차는 못 간다. 그림에서 주택가 안쪽의 촘촘한 선이 사라진다는 점을 설명하고, highway 종류별 개수는 교재에서 함께 계산한다.</a:t>
+              <a:t>highway에서 가장 많은 항목은 보도인 footway입니다. 보행·자전거 전용 엣지가 전체의 절반을 넘습니다. 이를 걸러내지 않고 자동차 최단경로를 계산하면 계단이나 산책로를 통과하는 경로가 나올 수 있습니다. 그림에서 필터 적용 후 주택가 안쪽의 촘촘한 선이 사라지는 부분을 확인하고, highway 종류별 개수는 교재에서 직접 계산합니다.</a:t>
             </a:r>
           </a:p>
         </p:txBody>
@@ -5081,7 +5081,7 @@
           <a:lstStyle/>
           <a:p>
             <a:r>
-              <a:t>3.1 edge_id 안에 있는 양 끝 노드</a:t>
+              <a:t>3.1 edge_id의 출발·도착 노드</a:t>
             </a:r>
           </a:p>
         </p:txBody>
@@ -5124,19 +5124,19 @@
           <a:p>
             <a:pPr/>
             <a:r>
-              <a:t>엣지 표에 source·target 컬럼 없음</a:t>
+              <a:t>출발·도착 노드: source와 target 대신 edge_id에 포함</a:t>
             </a:r>
           </a:p>
           <a:p>
             <a:pPr/>
             <a:r>
-              <a:t>node_id = OSM 번호 앞에 n</a:t>
+              <a:t>node_id 규칙: OSM 번호 앞에 n 추가</a:t>
             </a:r>
           </a:p>
           <a:p>
             <a:pPr/>
             <a:r>
-              <a:t>rsplit("_", 2)로 뒤 두 부분 분리</a:t>
+              <a:t>파싱 방법: rsplit("_", 2)로 뒤의 두 부분 분리</a:t>
             </a:r>
           </a:p>
         </p:txBody>
@@ -5636,7 +5636,7 @@
           <a:lstStyle/>
           <a:p>
             <a:r>
-              <a:t>3.2 짐작한 규칙은 그 자리에서 검증</a:t>
+              <a:t>3.2 edge_id 파싱 결과 검증</a:t>
             </a:r>
           </a:p>
         </p:txBody>
@@ -5697,13 +5697,13 @@
           <a:p>
             <a:pPr/>
             <a:r>
-              <a:t>검증 생략 시 — 몇 주 뒤 원인 불명의 경로</a:t>
+              <a:t>검증을 생략하면 잘못된 경로의 원인 추적이 어려움</a:t>
             </a:r>
           </a:p>
           <a:p>
             <a:pPr/>
             <a:r>
-              <a:t>이 과목의 데이터 태도: 짐작 직후 검증</a:t>
+              <a:t>데이터 처리 원칙: 규칙을 추정한 직후 기준 자료와 대조</a:t>
             </a:r>
           </a:p>
         </p:txBody>
@@ -5790,7 +5790,7 @@
           <a:lstStyle/>
           <a:p>
             <a:r>
-              <a:t>3.3 방향 f와 r</a:t>
+              <a:t>3.3 양방향 도로의 저장 방식</a:t>
             </a:r>
           </a:p>
         </p:txBody>
@@ -5993,7 +5993,7 @@
               <a:t>4.1  </a:t>
             </a:r>
             <a:r>
-              <a:t>엣지 절반은 자동차 통행 불가</a:t>
+              <a:t>자동차 통행 가능 엣지 선별</a:t>
             </a:r>
           </a:p>
           <a:p>
@@ -6050,7 +6050,7 @@
           <a:lstStyle/>
           <a:p>
             <a:r>
-              <a:t>4.1 엣지 절반은 자동차 통행 불가</a:t>
+              <a:t>4.1 자동차 통행 가능 엣지 선별</a:t>
             </a:r>
           </a:p>
         </p:txBody>
@@ -6252,19 +6252,25 @@
           <a:p>
             <a:pPr/>
             <a:r>
-              <a:t>종류별 중앙 속도 — 고속도로 100, 간선 60, 주택가 30 km/h</a:t>
+              <a:t>도로 종류별 중앙 속도: 고속도로 100 · 간선도로 60 · 주택가 30 km/h</a:t>
             </a:r>
           </a:p>
           <a:p>
             <a:pPr/>
             <a:r>
-              <a:t>속도 출처: OSM maxspeed 태그, 없으면 종류별 기본값</a:t>
+              <a:t>속도 출처: OSM maxspeed 태그 · 누락 시 도로 종류별 기본값</a:t>
             </a:r>
           </a:p>
           <a:p>
             <a:pPr/>
             <a:r>
-              <a:t>실제 주행 속도 아님 — 4장에서 실측으로 교체</a:t>
+              <a:t>free_flow_speed_kmh: 실제 주행 속도가 아닌 비혼잡 속도</a:t>
+            </a:r>
+          </a:p>
+          <a:p>
+            <a:pPr lvl="1"/>
+            <a:r>
+              <a:t>4장에서 시간대별 실측 속도로 교체</a:t>
             </a:r>
           </a:p>
         </p:txBody>
@@ -6778,7 +6784,7 @@
               <a:t>5.1  </a:t>
             </a:r>
             <a:r>
-              <a:t>비용은 거리가 아니라 소요시간</a:t>
+              <a:t>인접 리스트의 비용: 소요시간</a:t>
             </a:r>
           </a:p>
           <a:p>
@@ -6796,7 +6802,7 @@
               <a:t>5.2  </a:t>
             </a:r>
             <a:r>
-              <a:t>좌표의 최근접 노드 탐색</a:t>
+              <a:t>좌표를 도로망 노드에 연결</a:t>
             </a:r>
           </a:p>
         </p:txBody>
@@ -6835,7 +6841,7 @@
           <a:lstStyle/>
           <a:p>
             <a:r>
-              <a:t>5.1 비용은 거리가 아니라 소요시간</a:t>
+              <a:t>5.1 인접 리스트의 비용: 소요시간</a:t>
             </a:r>
           </a:p>
         </p:txBody>
@@ -7456,7 +7462,7 @@
           <a:lstStyle/>
           <a:p>
             <a:r>
-              <a:t>5.2 좌표의 최근접 노드 탐색</a:t>
+              <a:t>5.2 좌표를 도로망 노드에 연결</a:t>
             </a:r>
           </a:p>
         </p:txBody>
@@ -7499,25 +7505,19 @@
           <a:p>
             <a:pPr/>
             <a:r>
-              <a:t>호출 좌표는 노드 위치와 불일치 → 스냅 필요</a:t>
+              <a:t>호출 좌표와 노드 좌표의 불일치 → 최근접 노드로 스냅</a:t>
             </a:r>
           </a:p>
           <a:p>
             <a:pPr/>
             <a:r>
-              <a:t>전수 탐색: 1건에 수십 ms</a:t>
+              <a:t>전수 탐색: 1건 수십 ms → 1,000건 수십 초</a:t>
             </a:r>
           </a:p>
           <a:p>
             <a:pPr/>
             <a:r>
-              <a:t>승객 1,000명이면 수십 초</a:t>
-            </a:r>
-          </a:p>
-          <a:p>
-            <a:pPr/>
-            <a:r>
-              <a:t>KD-트리: 1회 구축 후 1,000건이 수 ms</a:t>
+              <a:t>KD-트리: 한 번 구축한 뒤 1,000건을 수 ms에 탐색</a:t>
             </a:r>
           </a:p>
         </p:txBody>
@@ -7704,7 +7704,7 @@
               <a:t>6.1  </a:t>
             </a:r>
             <a:r>
-              <a:t>도로망 한 장 요약</a:t>
+              <a:t>하남시 도로망 요약</a:t>
             </a:r>
           </a:p>
           <a:p>
@@ -7859,7 +7859,7 @@
                           </a:solidFill>
                           <a:latin typeface="Pretendard"/>
                         </a:rPr>
-                        <a:t>도입과 학습 목표</a:t>
+                        <a:t>도로망 데이터 소개</a:t>
                       </a:r>
                     </a:p>
                   </a:txBody>
@@ -7969,7 +7969,7 @@
                           </a:solidFill>
                           <a:latin typeface="Pretendard"/>
                         </a:rPr>
-                        <a:t>교재 2.1 도로망은 표 두 개</a:t>
+                        <a:t>교재 2.1 도로망의 기본 구조</a:t>
                       </a:r>
                     </a:p>
                   </a:txBody>
@@ -8115,7 +8115,7 @@
                           </a:solidFill>
                           <a:latin typeface="Pretendard Medium"/>
                         </a:rPr>
-                        <a:t>3.1 edge_id 안에 있는 양 끝 노드  ·  3.2 짐작한 규칙은 그 자리에서 검증  ·  3.3 방향 f와 r</a:t>
+                        <a:t>3.1 edge_id의 출발·도착 노드  ·  3.2 edge_id 파싱 결과 검증  ·  3.3 양방향 도로의 저장 방식</a:t>
                       </a:r>
                     </a:p>
                   </a:txBody>
@@ -8225,7 +8225,7 @@
                           </a:solidFill>
                           <a:latin typeface="Pretendard Medium"/>
                         </a:rPr>
-                        <a:t>4.1 엣지 절반은 자동차 통행 불가  ·  4.2 필터 적용 전후</a:t>
+                        <a:t>4.1 자동차 통행 가능 엣지 선별  ·  4.2 필터 적용 전후</a:t>
                       </a:r>
                     </a:p>
                   </a:txBody>
@@ -8335,7 +8335,7 @@
                           </a:solidFill>
                           <a:latin typeface="Pretendard Medium"/>
                         </a:rPr>
-                        <a:t>5.1 비용은 거리가 아니라 소요시간  ·  5.2 좌표의 최근접 노드 탐색</a:t>
+                        <a:t>5.1 인접 리스트의 비용: 소요시간  ·  5.2 좌표를 도로망 노드에 연결</a:t>
                       </a:r>
                     </a:p>
                   </a:txBody>
@@ -8445,7 +8445,7 @@
                           </a:solidFill>
                           <a:latin typeface="Pretendard Medium"/>
                         </a:rPr>
-                        <a:t>6.1 도로망 한 장 요약  ·  6.2 정리와 과제</a:t>
+                        <a:t>6.1 하남시 도로망 요약  ·  6.2 정리와 과제</a:t>
                       </a:r>
                     </a:p>
                   </a:txBody>
@@ -8556,7 +8556,7 @@
           <a:lstStyle/>
           <a:p>
             <a:r>
-              <a:t>6.1 도로망 한 장 요약</a:t>
+              <a:t>6.1 하남시 도로망 요약</a:t>
             </a:r>
           </a:p>
         </p:txBody>
@@ -8611,7 +8611,7 @@
           <a:p>
             <a:pPr/>
             <a:r>
-              <a:t>숫자마다 해석 한 문장 첨부</a:t>
+              <a:t>결과 작성 기준: 숫자마다 해석 한 문장 첨부</a:t>
             </a:r>
           </a:p>
         </p:txBody>
@@ -8849,7 +8849,7 @@
                           </a:solidFill>
                           <a:latin typeface="Pretendard Medium"/>
                         </a:rPr>
-                        <a:t>격자 아님 — 분기 적은 선형 구조</a:t>
+                        <a:t>분기가 적은 선형 구조</a:t>
                       </a:r>
                     </a:p>
                   </a:txBody>
@@ -9223,13 +9223,13 @@
           <a:p>
             <a:pPr/>
             <a:r>
-              <a:t>엣지의 양 끝은 컬럼이 아니라 edge_id 안</a:t>
+              <a:t>엣지의 양 끝 노드: 별도 컬럼이 아니라 edge_id에 포함</a:t>
             </a:r>
           </a:p>
           <a:p>
             <a:pPr/>
             <a:r>
-              <a:t>엣지 절반 이상이 보행로 — 필터 필수</a:t>
+              <a:t>자동차 경로 계산 전 통행수단 필터 적용</a:t>
             </a:r>
           </a:p>
           <a:p>
@@ -9241,13 +9241,13 @@
           <a:p>
             <a:pPr/>
             <a:r>
-              <a:t>HW1 (4주차 09-22 마감) — 오늘 내용과 다음 주 다익스트라</a:t>
+              <a:t>HW1 (4주차 09-22 마감) — 2장 도로망과 3장 다익스트라</a:t>
             </a:r>
           </a:p>
           <a:p>
             <a:pPr lvl="1"/>
             <a:r>
-              <a:t>A부는 오늘 만든 인접 리스트를 load_road_graph와 대조</a:t>
+              <a:t>A부는 이번 장에서 만든 인접 리스트를 load_road_graph와 대조</a:t>
             </a:r>
           </a:p>
           <a:p>
@@ -9442,7 +9442,7 @@
           <a:lstStyle/>
           <a:p>
             <a:r>
-              <a:t>도입과 학습 목표</a:t>
+              <a:t>도로망 데이터 소개</a:t>
             </a:r>
           </a:p>
         </p:txBody>
@@ -9572,7 +9572,7 @@
           <a:lstStyle/>
           <a:p>
             <a:r>
-              <a:t>1. 도입과 학습 목표</a:t>
+              <a:t>1. 도로망 데이터 소개</a:t>
             </a:r>
           </a:p>
         </p:txBody>
@@ -9594,19 +9594,19 @@
           <a:p>
             <a:pPr/>
             <a:r>
-              <a:t>0장의 소요시간 계산에 쓰인 자료 = 도로망</a:t>
+              <a:t>0장의 소요시간 계산에 사용한 자료: 도로망</a:t>
             </a:r>
           </a:p>
           <a:p>
             <a:pPr/>
             <a:r>
-              <a:t>도로망의 내용: 출발·도착 지점, 거리, 속도</a:t>
+              <a:t>도로망의 정보: 출발·도착 지점, 거리, 속도</a:t>
             </a:r>
           </a:p>
           <a:p>
             <a:pPr/>
             <a:r>
-              <a:t>이 장의 범위: 표를 직접 열고 함정 확인</a:t>
+              <a:t>이번 장의 범위: 데이터 표의 구조와 처리 시 주의점</a:t>
             </a:r>
           </a:p>
         </p:txBody>
@@ -9759,7 +9759,7 @@
           <a:lstStyle/>
           <a:p>
             <a:r>
-              <a:t>1. 도입과 학습 목표</a:t>
+              <a:t>1. 도로망 데이터 소개</a:t>
             </a:r>
           </a:p>
         </p:txBody>
@@ -9793,13 +9793,13 @@
           <a:p>
             <a:pPr/>
             <a:r>
-              <a:t>통행수단별 엣지 필터와 미적용 시의 결과</a:t>
+              <a:t>통행수단별 엣지 필터와 필터를 적용하지 않았을 때의 문제</a:t>
             </a:r>
           </a:p>
           <a:p>
             <a:pPr/>
             <a:r>
-              <a:t>KD-트리를 쓴 좌표 스냅 구현</a:t>
+              <a:t>KD-트리를 이용한 좌표 스냅 구현</a:t>
             </a:r>
           </a:p>
         </p:txBody>
@@ -9907,7 +9907,7 @@
           <a:lstStyle/>
           <a:p>
             <a:r>
-              <a:t>1. 도입과 학습 목표</a:t>
+              <a:t>1. 도로망 데이터 소개</a:t>
             </a:r>
           </a:p>
         </p:txBody>
@@ -10314,7 +10314,7 @@
           <a:lstStyle/>
           <a:p>
             <a:r>
-              <a:t>교재 2.1 도로망은 표 두 개</a:t>
+              <a:t>교재 2.1 도로망의 기본 구조</a:t>
             </a:r>
           </a:p>
         </p:txBody>
@@ -10408,7 +10408,7 @@
           <a:lstStyle/>
           <a:p>
             <a:r>
-              <a:t>2. 교재 2.1 도로망은 표 두 개</a:t>
+              <a:t>2. 교재 2.1 도로망의 기본 구조</a:t>
             </a:r>
           </a:p>
         </p:txBody>
@@ -10436,25 +10436,31 @@
           <a:p>
             <a:pPr/>
             <a:r>
-              <a:t>node_type 거의 전부 교차로</a:t>
+              <a:t>node_type: 대부분 교차로</a:t>
             </a:r>
           </a:p>
           <a:p>
             <a:pPr lvl="1"/>
             <a:r>
-              <a:t>boundary는 시 경계 절단점</a:t>
+              <a:t>boundary는 시 경계에서 잘린 지점</a:t>
             </a:r>
           </a:p>
           <a:p>
             <a:pPr/>
             <a:r>
-              <a:t>꺾이기만 하는 중간점은 노드 아님</a:t>
+              <a:t>도로가 휘어지는 중간 지점은 노드에서 제외</a:t>
             </a:r>
           </a:p>
           <a:p>
             <a:pPr/>
             <a:r>
-              <a:t>length ÷ speed = 구간 소요시간 (3장의 비용)</a:t>
+              <a:t>length ÷ speed = 구간 소요시간</a:t>
+            </a:r>
+          </a:p>
+          <a:p>
+            <a:pPr lvl="1"/>
+            <a:r>
+              <a:t>3장에서 최단경로의 비용으로 사용</a:t>
             </a:r>
           </a:p>
         </p:txBody>
@@ -10968,7 +10974,7 @@
               <a:t>3.1  </a:t>
             </a:r>
             <a:r>
-              <a:t>edge_id 안에 있는 양 끝 노드</a:t>
+              <a:t>edge_id의 출발·도착 노드</a:t>
             </a:r>
           </a:p>
           <a:p>
@@ -10986,7 +10992,7 @@
               <a:t>3.2  </a:t>
             </a:r>
             <a:r>
-              <a:t>짐작한 규칙은 그 자리에서 검증</a:t>
+              <a:t>edge_id 파싱 결과 검증</a:t>
             </a:r>
           </a:p>
           <a:p>
@@ -11004,7 +11010,7 @@
               <a:t>3.3  </a:t>
             </a:r>
             <a:r>
-              <a:t>방향 f와 r</a:t>
+              <a:t>양방향 도로의 저장 방식</a:t>
             </a:r>
           </a:p>
         </p:txBody>
